--- a/Slides/06. LINEBOT程式講解.pptx
+++ b/Slides/06. LINEBOT程式講解.pptx
@@ -6,7 +6,7 @@
     <p:sldMasterId id="2147483660" r:id="rId2"/>
   </p:sldMasterIdLst>
   <p:notesMasterIdLst>
-    <p:notesMasterId r:id="rId16"/>
+    <p:notesMasterId r:id="rId13"/>
   </p:notesMasterIdLst>
   <p:sldIdLst>
     <p:sldId id="681" r:id="rId3"/>
@@ -16,12 +16,9 @@
     <p:sldId id="1366" r:id="rId7"/>
     <p:sldId id="1473" r:id="rId8"/>
     <p:sldId id="1474" r:id="rId9"/>
-    <p:sldId id="1475" r:id="rId10"/>
-    <p:sldId id="1476" r:id="rId11"/>
-    <p:sldId id="1477" r:id="rId12"/>
-    <p:sldId id="1478" r:id="rId13"/>
-    <p:sldId id="1479" r:id="rId14"/>
-    <p:sldId id="1480" r:id="rId15"/>
+    <p:sldId id="1478" r:id="rId10"/>
+    <p:sldId id="1479" r:id="rId11"/>
+    <p:sldId id="1480" r:id="rId12"/>
   </p:sldIdLst>
   <p:sldSz cx="9144000" cy="6858000" type="screen4x3"/>
   <p:notesSz cx="6858000" cy="9144000"/>
@@ -210,7 +207,7 @@
           <a:p>
             <a:fld id="{90CC8E63-1016-4C78-A51D-85D69DBCD8EF}" type="datetimeFigureOut">
               <a:rPr lang="zh-TW" altLang="en-US" smtClean="0"/>
-              <a:t>2026/3/26</a:t>
+              <a:t>2026/4/16</a:t>
             </a:fld>
             <a:endParaRPr lang="zh-TW" altLang="en-US"/>
           </a:p>
@@ -769,7 +766,7 @@
                 <a:tabLst/>
                 <a:defRPr/>
               </a:pPr>
-              <a:t>13</a:t>
+              <a:t>10</a:t>
             </a:fld>
             <a:endParaRPr kumimoji="0" lang="en-US" sz="1200" b="0" i="0" u="none" strike="noStrike" kern="1200" cap="none" spc="0" normalizeH="0" baseline="0" noProof="0" dirty="0">
               <a:ln>
@@ -1938,7 +1935,7 @@
                 <a:tabLst/>
                 <a:defRPr/>
               </a:pPr>
-              <a:t>11</a:t>
+              <a:t>8</a:t>
             </a:fld>
             <a:endParaRPr kumimoji="0" lang="en-US" sz="1200" b="0" i="0" u="none" strike="noStrike" kern="1200" cap="none" spc="0" normalizeH="0" baseline="0" noProof="0" dirty="0">
               <a:ln>
@@ -2111,7 +2108,7 @@
                 <a:tabLst/>
                 <a:defRPr/>
               </a:pPr>
-              <a:t>12</a:t>
+              <a:t>9</a:t>
             </a:fld>
             <a:endParaRPr kumimoji="0" lang="en-US" sz="1200" b="0" i="0" u="none" strike="noStrike" kern="1200" cap="none" spc="0" normalizeH="0" baseline="0" noProof="0" dirty="0">
               <a:ln>
@@ -2290,7 +2287,7 @@
           <a:p>
             <a:fld id="{2E29796B-F55F-40BA-947E-19D03180300F}" type="datetimeFigureOut">
               <a:rPr lang="zh-TW" altLang="en-US" smtClean="0"/>
-              <a:t>2026/3/26</a:t>
+              <a:t>2026/4/16</a:t>
             </a:fld>
             <a:endParaRPr lang="zh-TW" altLang="en-US"/>
           </a:p>
@@ -2488,7 +2485,7 @@
           <a:p>
             <a:fld id="{2E29796B-F55F-40BA-947E-19D03180300F}" type="datetimeFigureOut">
               <a:rPr lang="zh-TW" altLang="en-US" smtClean="0"/>
-              <a:t>2026/3/26</a:t>
+              <a:t>2026/4/16</a:t>
             </a:fld>
             <a:endParaRPr lang="zh-TW" altLang="en-US"/>
           </a:p>
@@ -2696,7 +2693,7 @@
           <a:p>
             <a:fld id="{2E29796B-F55F-40BA-947E-19D03180300F}" type="datetimeFigureOut">
               <a:rPr lang="zh-TW" altLang="en-US" smtClean="0"/>
-              <a:t>2026/3/26</a:t>
+              <a:t>2026/4/16</a:t>
             </a:fld>
             <a:endParaRPr lang="zh-TW" altLang="en-US"/>
           </a:p>
@@ -3077,7 +3074,7 @@
                 </a:solidFill>
               </a:rPr>
               <a:pPr/>
-              <a:t>3/26/2026</a:t>
+              <a:t>4/16/2026</a:t>
             </a:fld>
             <a:endParaRPr kumimoji="0" lang="en-US" dirty="0"/>
           </a:p>
@@ -3308,7 +3305,7 @@
                 </a:solidFill>
               </a:rPr>
               <a:pPr/>
-              <a:t>3/26/2026</a:t>
+              <a:t>4/16/2026</a:t>
             </a:fld>
             <a:endParaRPr kumimoji="0" lang="en-US" dirty="0"/>
           </a:p>
@@ -3541,7 +3538,7 @@
                 </a:solidFill>
               </a:rPr>
               <a:pPr/>
-              <a:t>3/26/2026</a:t>
+              <a:t>4/16/2026</a:t>
             </a:fld>
             <a:endParaRPr kumimoji="0" lang="en-US" dirty="0"/>
           </a:p>
@@ -4023,7 +4020,7 @@
                 </a:solidFill>
               </a:rPr>
               <a:pPr/>
-              <a:t>3/26/2026</a:t>
+              <a:t>4/16/2026</a:t>
             </a:fld>
             <a:endParaRPr kumimoji="0" lang="en-US" dirty="0"/>
           </a:p>
@@ -4380,7 +4377,7 @@
                 </a:solidFill>
               </a:rPr>
               <a:pPr/>
-              <a:t>3/26/2026</a:t>
+              <a:t>4/16/2026</a:t>
             </a:fld>
             <a:endParaRPr kumimoji="0" lang="en-US" dirty="0"/>
           </a:p>
@@ -4743,7 +4740,7 @@
                 </a:solidFill>
               </a:rPr>
               <a:pPr/>
-              <a:t>3/26/2026</a:t>
+              <a:t>4/16/2026</a:t>
             </a:fld>
             <a:endParaRPr kumimoji="0" lang="en-US" dirty="0"/>
           </a:p>
@@ -5053,7 +5050,7 @@
                 </a:solidFill>
               </a:rPr>
               <a:pPr/>
-              <a:t>3/26/2026</a:t>
+              <a:t>4/16/2026</a:t>
             </a:fld>
             <a:endParaRPr kumimoji="0" lang="en-US" dirty="0"/>
           </a:p>
@@ -5248,7 +5245,7 @@
           <a:p>
             <a:fld id="{2E29796B-F55F-40BA-947E-19D03180300F}" type="datetimeFigureOut">
               <a:rPr lang="zh-TW" altLang="en-US" smtClean="0"/>
-              <a:t>2026/3/26</a:t>
+              <a:t>2026/4/16</a:t>
             </a:fld>
             <a:endParaRPr lang="zh-TW" altLang="en-US"/>
           </a:p>
@@ -5732,7 +5729,7 @@
                 </a:solidFill>
               </a:rPr>
               <a:pPr/>
-              <a:t>3/26/2026</a:t>
+              <a:t>4/16/2026</a:t>
             </a:fld>
             <a:endParaRPr kumimoji="0" lang="en-US" dirty="0"/>
           </a:p>
@@ -6128,7 +6125,7 @@
                 </a:solidFill>
               </a:rPr>
               <a:pPr/>
-              <a:t>3/26/2026</a:t>
+              <a:t>4/16/2026</a:t>
             </a:fld>
             <a:endParaRPr kumimoji="0" lang="en-US" dirty="0"/>
           </a:p>
@@ -6468,7 +6465,7 @@
                 </a:solidFill>
               </a:rPr>
               <a:pPr/>
-              <a:t>3/26/2026</a:t>
+              <a:t>4/16/2026</a:t>
             </a:fld>
             <a:endParaRPr kumimoji="0" lang="en-US" dirty="0"/>
           </a:p>
@@ -7049,7 +7046,7 @@
                 </a:solidFill>
               </a:rPr>
               <a:pPr/>
-              <a:t>3/26/2026</a:t>
+              <a:t>4/16/2026</a:t>
             </a:fld>
             <a:endParaRPr kumimoji="0" lang="en-US" dirty="0"/>
           </a:p>
@@ -7618,7 +7615,7 @@
                 </a:solidFill>
               </a:rPr>
               <a:pPr/>
-              <a:t>3/26/2026</a:t>
+              <a:t>4/16/2026</a:t>
             </a:fld>
             <a:endParaRPr kumimoji="0" lang="en-US" dirty="0"/>
           </a:p>
@@ -8082,7 +8079,7 @@
                 </a:solidFill>
               </a:rPr>
               <a:pPr/>
-              <a:t>3/26/2026</a:t>
+              <a:t>4/16/2026</a:t>
             </a:fld>
             <a:endParaRPr kumimoji="0" lang="en-US" dirty="0"/>
           </a:p>
@@ -8511,7 +8508,7 @@
                 </a:solidFill>
               </a:rPr>
               <a:pPr/>
-              <a:t>3/26/2026</a:t>
+              <a:t>4/16/2026</a:t>
             </a:fld>
             <a:endParaRPr kumimoji="0" lang="en-US" dirty="0"/>
           </a:p>
@@ -9020,7 +9017,7 @@
                 </a:solidFill>
               </a:rPr>
               <a:pPr/>
-              <a:t>3/26/2026</a:t>
+              <a:t>4/16/2026</a:t>
             </a:fld>
             <a:endParaRPr kumimoji="0" lang="en-US" dirty="0"/>
           </a:p>
@@ -9529,7 +9526,7 @@
                 </a:solidFill>
               </a:rPr>
               <a:pPr/>
-              <a:t>3/26/2026</a:t>
+              <a:t>4/16/2026</a:t>
             </a:fld>
             <a:endParaRPr kumimoji="0" lang="en-US" dirty="0"/>
           </a:p>
@@ -9750,7 +9747,7 @@
                 </a:solidFill>
               </a:rPr>
               <a:pPr/>
-              <a:t>3/26/2026</a:t>
+              <a:t>4/16/2026</a:t>
             </a:fld>
             <a:endParaRPr kumimoji="0" lang="en-US" dirty="0"/>
           </a:p>
@@ -10022,7 +10019,7 @@
           <a:p>
             <a:fld id="{2E29796B-F55F-40BA-947E-19D03180300F}" type="datetimeFigureOut">
               <a:rPr lang="zh-TW" altLang="en-US" smtClean="0"/>
-              <a:t>2026/3/26</a:t>
+              <a:t>2026/4/16</a:t>
             </a:fld>
             <a:endParaRPr lang="zh-TW" altLang="en-US"/>
           </a:p>
@@ -10358,7 +10355,7 @@
                 </a:solidFill>
               </a:rPr>
               <a:pPr/>
-              <a:t>3/26/2026</a:t>
+              <a:t>4/16/2026</a:t>
             </a:fld>
             <a:endParaRPr kumimoji="0" lang="en-US" dirty="0"/>
           </a:p>
@@ -10582,7 +10579,7 @@
                 </a:solidFill>
               </a:rPr>
               <a:pPr/>
-              <a:t>3/26/2026</a:t>
+              <a:t>4/16/2026</a:t>
             </a:fld>
             <a:endParaRPr kumimoji="0" lang="en-US" dirty="0"/>
           </a:p>
@@ -10763,7 +10760,7 @@
             <a:fld id="{ACB2EC6F-6501-4E04-BD6C-A8A6CABB2C5B}" type="datetimeFigureOut">
               <a:rPr kumimoji="0" lang="en-US" smtClean="0"/>
               <a:pPr/>
-              <a:t>3/26/2026</a:t>
+              <a:t>4/16/2026</a:t>
             </a:fld>
             <a:endParaRPr kumimoji="0" lang="en-US" dirty="0"/>
           </a:p>
@@ -11047,7 +11044,7 @@
           <a:p>
             <a:fld id="{2E29796B-F55F-40BA-947E-19D03180300F}" type="datetimeFigureOut">
               <a:rPr lang="zh-TW" altLang="en-US" smtClean="0"/>
-              <a:t>2026/3/26</a:t>
+              <a:t>2026/4/16</a:t>
             </a:fld>
             <a:endParaRPr lang="zh-TW" altLang="en-US"/>
           </a:p>
@@ -11459,7 +11456,7 @@
           <a:p>
             <a:fld id="{2E29796B-F55F-40BA-947E-19D03180300F}" type="datetimeFigureOut">
               <a:rPr lang="zh-TW" altLang="en-US" smtClean="0"/>
-              <a:t>2026/3/26</a:t>
+              <a:t>2026/4/16</a:t>
             </a:fld>
             <a:endParaRPr lang="zh-TW" altLang="en-US"/>
           </a:p>
@@ -11600,7 +11597,7 @@
           <a:p>
             <a:fld id="{2E29796B-F55F-40BA-947E-19D03180300F}" type="datetimeFigureOut">
               <a:rPr lang="zh-TW" altLang="en-US" smtClean="0"/>
-              <a:t>2026/3/26</a:t>
+              <a:t>2026/4/16</a:t>
             </a:fld>
             <a:endParaRPr lang="zh-TW" altLang="en-US"/>
           </a:p>
@@ -11713,7 +11710,7 @@
           <a:p>
             <a:fld id="{2E29796B-F55F-40BA-947E-19D03180300F}" type="datetimeFigureOut">
               <a:rPr lang="zh-TW" altLang="en-US" smtClean="0"/>
-              <a:t>2026/3/26</a:t>
+              <a:t>2026/4/16</a:t>
             </a:fld>
             <a:endParaRPr lang="zh-TW" altLang="en-US"/>
           </a:p>
@@ -12024,7 +12021,7 @@
           <a:p>
             <a:fld id="{2E29796B-F55F-40BA-947E-19D03180300F}" type="datetimeFigureOut">
               <a:rPr lang="zh-TW" altLang="en-US" smtClean="0"/>
-              <a:t>2026/3/26</a:t>
+              <a:t>2026/4/16</a:t>
             </a:fld>
             <a:endParaRPr lang="zh-TW" altLang="en-US"/>
           </a:p>
@@ -12312,7 +12309,7 @@
           <a:p>
             <a:fld id="{2E29796B-F55F-40BA-947E-19D03180300F}" type="datetimeFigureOut">
               <a:rPr lang="zh-TW" altLang="en-US" smtClean="0"/>
-              <a:t>2026/3/26</a:t>
+              <a:t>2026/4/16</a:t>
             </a:fld>
             <a:endParaRPr lang="zh-TW" altLang="en-US"/>
           </a:p>
@@ -12553,7 +12550,7 @@
           <a:p>
             <a:fld id="{2E29796B-F55F-40BA-947E-19D03180300F}" type="datetimeFigureOut">
               <a:rPr lang="zh-TW" altLang="en-US" smtClean="0"/>
-              <a:t>2026/3/26</a:t>
+              <a:t>2026/4/16</a:t>
             </a:fld>
             <a:endParaRPr lang="zh-TW" altLang="en-US"/>
           </a:p>
@@ -13125,7 +13122,7 @@
                 </a:solidFill>
               </a:rPr>
               <a:pPr/>
-              <a:t>3/26/2026</a:t>
+              <a:t>4/16/2026</a:t>
             </a:fld>
             <a:endParaRPr kumimoji="0" lang="en-US" sz="1200" dirty="0">
               <a:solidFill>
@@ -13838,730 +13835,6 @@
   <p:cSld>
     <p:spTree>
       <p:nvGrpSpPr>
-        <p:cNvPr id="1" name=""/>
-        <p:cNvGrpSpPr/>
-        <p:nvPr/>
-      </p:nvGrpSpPr>
-      <p:grpSpPr>
-        <a:xfrm>
-          <a:off x="0" y="0"/>
-          <a:ext cx="0" cy="0"/>
-          <a:chOff x="0" y="0"/>
-          <a:chExt cx="0" cy="0"/>
-        </a:xfrm>
-      </p:grpSpPr>
-      <p:pic>
-        <p:nvPicPr>
-          <p:cNvPr id="5" name="圖片 4">
-            <a:extLst>
-              <a:ext uri="{FF2B5EF4-FFF2-40B4-BE49-F238E27FC236}">
-                <a16:creationId xmlns:a16="http://schemas.microsoft.com/office/drawing/2014/main" id="{26D0BE73-507C-3A1C-001F-75BC849837F4}"/>
-              </a:ext>
-            </a:extLst>
-          </p:cNvPr>
-          <p:cNvPicPr>
-            <a:picLocks noChangeAspect="1"/>
-          </p:cNvPicPr>
-          <p:nvPr/>
-        </p:nvPicPr>
-        <p:blipFill>
-          <a:blip r:embed="rId2"/>
-          <a:stretch>
-            <a:fillRect/>
-          </a:stretch>
-        </p:blipFill>
-        <p:spPr>
-          <a:xfrm>
-            <a:off x="134257" y="932141"/>
-            <a:ext cx="8875486" cy="5149508"/>
-          </a:xfrm>
-          <a:prstGeom prst="rect">
-            <a:avLst/>
-          </a:prstGeom>
-        </p:spPr>
-      </p:pic>
-    </p:spTree>
-    <p:extLst>
-      <p:ext uri="{BB962C8B-B14F-4D97-AF65-F5344CB8AC3E}">
-        <p14:creationId xmlns:p14="http://schemas.microsoft.com/office/powerpoint/2010/main" val="3060838421"/>
-      </p:ext>
-    </p:extLst>
-  </p:cSld>
-  <p:clrMapOvr>
-    <a:masterClrMapping/>
-  </p:clrMapOvr>
-  <p:transition>
-    <p:fade/>
-  </p:transition>
-</p:sld>
-</file>
-
-<file path=ppt/slides/slide11.xml><?xml version="1.0" encoding="utf-8"?>
-<p:sld xmlns:a="http://schemas.openxmlformats.org/drawingml/2006/main" xmlns:r="http://schemas.openxmlformats.org/officeDocument/2006/relationships" xmlns:p="http://schemas.openxmlformats.org/presentationml/2006/main">
-  <p:cSld>
-    <p:spTree>
-      <p:nvGrpSpPr>
-        <p:cNvPr id="1" name="">
-          <a:extLst>
-            <a:ext uri="{FF2B5EF4-FFF2-40B4-BE49-F238E27FC236}">
-              <a16:creationId xmlns:a16="http://schemas.microsoft.com/office/drawing/2014/main" id="{9F58F0C6-9762-2AD0-DCC2-DFC64D7D256D}"/>
-            </a:ext>
-          </a:extLst>
-        </p:cNvPr>
-        <p:cNvGrpSpPr/>
-        <p:nvPr/>
-      </p:nvGrpSpPr>
-      <p:grpSpPr>
-        <a:xfrm>
-          <a:off x="0" y="0"/>
-          <a:ext cx="0" cy="0"/>
-          <a:chOff x="0" y="0"/>
-          <a:chExt cx="0" cy="0"/>
-        </a:xfrm>
-      </p:grpSpPr>
-      <p:sp>
-        <p:nvSpPr>
-          <p:cNvPr id="4" name="文字方塊 3">
-            <a:extLst>
-              <a:ext uri="{FF2B5EF4-FFF2-40B4-BE49-F238E27FC236}">
-                <a16:creationId xmlns:a16="http://schemas.microsoft.com/office/drawing/2014/main" id="{F767E329-352E-C746-86B2-23CE91737E8E}"/>
-              </a:ext>
-            </a:extLst>
-          </p:cNvPr>
-          <p:cNvSpPr txBox="1"/>
-          <p:nvPr/>
-        </p:nvSpPr>
-        <p:spPr>
-          <a:xfrm>
-            <a:off x="783076" y="3013501"/>
-            <a:ext cx="7772400" cy="830997"/>
-          </a:xfrm>
-          <a:prstGeom prst="rect">
-            <a:avLst/>
-          </a:prstGeom>
-          <a:noFill/>
-        </p:spPr>
-        <p:txBody>
-          <a:bodyPr wrap="square" rtlCol="0">
-            <a:spAutoFit/>
-          </a:bodyPr>
-          <a:lstStyle/>
-          <a:p>
-            <a:pPr algn="ctr"/>
-            <a:r>
-              <a:rPr kumimoji="1" lang="en-US" altLang="zh-TW" sz="4800" b="1" dirty="0">
-                <a:solidFill>
-                  <a:srgbClr val="00B0F0"/>
-                </a:solidFill>
-                <a:effectLst>
-                  <a:outerShdw blurRad="38100" dist="38100" dir="2700000" algn="tl">
-                    <a:srgbClr val="000000">
-                      <a:alpha val="43137"/>
-                    </a:srgbClr>
-                  </a:outerShdw>
-                </a:effectLst>
-                <a:latin typeface="微軟正黑體" panose="020B0604030504040204" pitchFamily="34" charset="-120"/>
-                <a:ea typeface="微軟正黑體" panose="020B0604030504040204" pitchFamily="34" charset="-120"/>
-                <a:cs typeface="Arial"/>
-              </a:rPr>
-              <a:t>Google Gemini</a:t>
-            </a:r>
-            <a:r>
-              <a:rPr kumimoji="1" lang="zh-TW" altLang="en-US" sz="4800" b="1" dirty="0">
-                <a:solidFill>
-                  <a:srgbClr val="00B0F0"/>
-                </a:solidFill>
-                <a:effectLst>
-                  <a:outerShdw blurRad="38100" dist="38100" dir="2700000" algn="tl">
-                    <a:srgbClr val="000000">
-                      <a:alpha val="43137"/>
-                    </a:srgbClr>
-                  </a:outerShdw>
-                </a:effectLst>
-                <a:latin typeface="微軟正黑體" panose="020B0604030504040204" pitchFamily="34" charset="-120"/>
-                <a:ea typeface="微軟正黑體" panose="020B0604030504040204" pitchFamily="34" charset="-120"/>
-                <a:cs typeface="Arial"/>
-              </a:rPr>
-              <a:t>系列</a:t>
-            </a:r>
-          </a:p>
-        </p:txBody>
-      </p:sp>
-    </p:spTree>
-    <p:extLst>
-      <p:ext uri="{BB962C8B-B14F-4D97-AF65-F5344CB8AC3E}">
-        <p14:creationId xmlns:p14="http://schemas.microsoft.com/office/powerpoint/2010/main" val="2328856869"/>
-      </p:ext>
-    </p:extLst>
-  </p:cSld>
-  <p:clrMapOvr>
-    <a:masterClrMapping/>
-  </p:clrMapOvr>
-  <p:transition>
-    <p:fade/>
-  </p:transition>
-</p:sld>
-</file>
-
-<file path=ppt/slides/slide12.xml><?xml version="1.0" encoding="utf-8"?>
-<p:sld xmlns:a="http://schemas.openxmlformats.org/drawingml/2006/main" xmlns:r="http://schemas.openxmlformats.org/officeDocument/2006/relationships" xmlns:p="http://schemas.openxmlformats.org/presentationml/2006/main">
-  <p:cSld>
-    <p:spTree>
-      <p:nvGrpSpPr>
-        <p:cNvPr id="1" name="">
-          <a:extLst>
-            <a:ext uri="{FF2B5EF4-FFF2-40B4-BE49-F238E27FC236}">
-              <a16:creationId xmlns:a16="http://schemas.microsoft.com/office/drawing/2014/main" id="{CB70D9A2-F143-8399-8CDB-FDAA17FB3AAE}"/>
-            </a:ext>
-          </a:extLst>
-        </p:cNvPr>
-        <p:cNvGrpSpPr/>
-        <p:nvPr/>
-      </p:nvGrpSpPr>
-      <p:grpSpPr>
-        <a:xfrm>
-          <a:off x="0" y="0"/>
-          <a:ext cx="0" cy="0"/>
-          <a:chOff x="0" y="0"/>
-          <a:chExt cx="0" cy="0"/>
-        </a:xfrm>
-      </p:grpSpPr>
-      <p:sp>
-        <p:nvSpPr>
-          <p:cNvPr id="5" name="文字方塊 4">
-            <a:extLst>
-              <a:ext uri="{FF2B5EF4-FFF2-40B4-BE49-F238E27FC236}">
-                <a16:creationId xmlns:a16="http://schemas.microsoft.com/office/drawing/2014/main" id="{D8161B37-ADB0-A69C-B700-6552A5E4FF78}"/>
-              </a:ext>
-            </a:extLst>
-          </p:cNvPr>
-          <p:cNvSpPr txBox="1"/>
-          <p:nvPr/>
-        </p:nvSpPr>
-        <p:spPr>
-          <a:xfrm>
-            <a:off x="361320" y="1463047"/>
-            <a:ext cx="8499876" cy="4031873"/>
-          </a:xfrm>
-          <a:prstGeom prst="rect">
-            <a:avLst/>
-          </a:prstGeom>
-          <a:noFill/>
-        </p:spPr>
-        <p:txBody>
-          <a:bodyPr wrap="square" rtlCol="0">
-            <a:spAutoFit/>
-          </a:bodyPr>
-          <a:lstStyle/>
-          <a:p>
-            <a:pPr marL="514338" indent="-514338">
-              <a:buFont typeface="Arial" panose="020B0604020202020204" pitchFamily="34" charset="0"/>
-              <a:buChar char="•"/>
-            </a:pPr>
-            <a:r>
-              <a:rPr kumimoji="1" lang="en-US" altLang="zh-TW" sz="3200" dirty="0">
-                <a:solidFill>
-                  <a:prstClr val="white"/>
-                </a:solidFill>
-                <a:effectLst>
-                  <a:outerShdw blurRad="38100" dist="38100" dir="2700000" algn="tl">
-                    <a:srgbClr val="000000">
-                      <a:alpha val="43137"/>
-                    </a:srgbClr>
-                  </a:outerShdw>
-                </a:effectLst>
-                <a:latin typeface="微軟正黑體" panose="020B0604030504040204" pitchFamily="34" charset="-120"/>
-                <a:ea typeface="微軟正黑體" panose="020B0604030504040204" pitchFamily="34" charset="-120"/>
-                <a:cs typeface="Heiti TC Light"/>
-              </a:rPr>
-              <a:t>ChatGPT</a:t>
-            </a:r>
-            <a:r>
-              <a:rPr kumimoji="1" lang="zh-TW" altLang="en-US" sz="3200" dirty="0">
-                <a:solidFill>
-                  <a:prstClr val="white"/>
-                </a:solidFill>
-                <a:effectLst>
-                  <a:outerShdw blurRad="38100" dist="38100" dir="2700000" algn="tl">
-                    <a:srgbClr val="000000">
-                      <a:alpha val="43137"/>
-                    </a:srgbClr>
-                  </a:outerShdw>
-                </a:effectLst>
-                <a:latin typeface="微軟正黑體" panose="020B0604030504040204" pitchFamily="34" charset="-120"/>
-                <a:ea typeface="微軟正黑體" panose="020B0604030504040204" pitchFamily="34" charset="-120"/>
-                <a:cs typeface="Heiti TC Light"/>
-              </a:rPr>
-              <a:t>就是一個依靠生成式模型的應用程式，主要是提供聊天式對話</a:t>
-            </a:r>
-            <a:endParaRPr kumimoji="1" lang="en-US" altLang="zh-TW" sz="3200" dirty="0">
-              <a:solidFill>
-                <a:prstClr val="white"/>
-              </a:solidFill>
-              <a:effectLst>
-                <a:outerShdw blurRad="38100" dist="38100" dir="2700000" algn="tl">
-                  <a:srgbClr val="000000">
-                    <a:alpha val="43137"/>
-                  </a:srgbClr>
-                </a:outerShdw>
-              </a:effectLst>
-              <a:latin typeface="微軟正黑體" panose="020B0604030504040204" pitchFamily="34" charset="-120"/>
-              <a:ea typeface="微軟正黑體" panose="020B0604030504040204" pitchFamily="34" charset="-120"/>
-              <a:cs typeface="Heiti TC Light"/>
-            </a:endParaRPr>
-          </a:p>
-          <a:p>
-            <a:pPr marL="514338" indent="-514338">
-              <a:buFont typeface="Arial" panose="020B0604020202020204" pitchFamily="34" charset="0"/>
-              <a:buChar char="•"/>
-            </a:pPr>
-            <a:r>
-              <a:rPr kumimoji="1" lang="zh-TW" altLang="en-US" sz="3200" dirty="0">
-                <a:solidFill>
-                  <a:prstClr val="white"/>
-                </a:solidFill>
-                <a:effectLst>
-                  <a:outerShdw blurRad="38100" dist="38100" dir="2700000" algn="tl">
-                    <a:srgbClr val="000000">
-                      <a:alpha val="43137"/>
-                    </a:srgbClr>
-                  </a:outerShdw>
-                </a:effectLst>
-                <a:latin typeface="微軟正黑體" panose="020B0604030504040204" pitchFamily="34" charset="-120"/>
-                <a:ea typeface="微軟正黑體" panose="020B0604030504040204" pitchFamily="34" charset="-120"/>
-                <a:cs typeface="Heiti TC Light"/>
-              </a:rPr>
-              <a:t>可以不透過</a:t>
-            </a:r>
-            <a:r>
-              <a:rPr kumimoji="1" lang="en-US" altLang="zh-TW" sz="3200" dirty="0">
-                <a:solidFill>
-                  <a:prstClr val="white"/>
-                </a:solidFill>
-                <a:effectLst>
-                  <a:outerShdw blurRad="38100" dist="38100" dir="2700000" algn="tl">
-                    <a:srgbClr val="000000">
-                      <a:alpha val="43137"/>
-                    </a:srgbClr>
-                  </a:outerShdw>
-                </a:effectLst>
-                <a:latin typeface="微軟正黑體" panose="020B0604030504040204" pitchFamily="34" charset="-120"/>
-                <a:ea typeface="微軟正黑體" panose="020B0604030504040204" pitchFamily="34" charset="-120"/>
-                <a:cs typeface="Heiti TC Light"/>
-              </a:rPr>
-              <a:t>Chat</a:t>
-            </a:r>
-            <a:r>
-              <a:rPr kumimoji="1" lang="zh-TW" altLang="en-US" sz="3200" dirty="0">
-                <a:solidFill>
-                  <a:prstClr val="white"/>
-                </a:solidFill>
-                <a:effectLst>
-                  <a:outerShdw blurRad="38100" dist="38100" dir="2700000" algn="tl">
-                    <a:srgbClr val="000000">
-                      <a:alpha val="43137"/>
-                    </a:srgbClr>
-                  </a:outerShdw>
-                </a:effectLst>
-                <a:latin typeface="微軟正黑體" panose="020B0604030504040204" pitchFamily="34" charset="-120"/>
-                <a:ea typeface="微軟正黑體" panose="020B0604030504040204" pitchFamily="34" charset="-120"/>
-                <a:cs typeface="Heiti TC Light"/>
-              </a:rPr>
-              <a:t>介面，直接用程式語言的方式讓模型產生結果，必須使用</a:t>
-            </a:r>
-            <a:r>
-              <a:rPr kumimoji="1" lang="en-US" altLang="zh-TW" sz="3200" dirty="0">
-                <a:solidFill>
-                  <a:prstClr val="white"/>
-                </a:solidFill>
-                <a:effectLst>
-                  <a:outerShdw blurRad="38100" dist="38100" dir="2700000" algn="tl">
-                    <a:srgbClr val="000000">
-                      <a:alpha val="43137"/>
-                    </a:srgbClr>
-                  </a:outerShdw>
-                </a:effectLst>
-                <a:latin typeface="微軟正黑體" panose="020B0604030504040204" pitchFamily="34" charset="-120"/>
-                <a:ea typeface="微軟正黑體" panose="020B0604030504040204" pitchFamily="34" charset="-120"/>
-                <a:cs typeface="Heiti TC Light"/>
-              </a:rPr>
-              <a:t>API</a:t>
-            </a:r>
-          </a:p>
-          <a:p>
-            <a:pPr marL="514338" indent="-514338">
-              <a:buFont typeface="Arial" panose="020B0604020202020204" pitchFamily="34" charset="0"/>
-              <a:buChar char="•"/>
-            </a:pPr>
-            <a:r>
-              <a:rPr kumimoji="1" lang="zh-TW" altLang="en-US" sz="3200" dirty="0">
-                <a:solidFill>
-                  <a:prstClr val="white"/>
-                </a:solidFill>
-                <a:effectLst>
-                  <a:outerShdw blurRad="38100" dist="38100" dir="2700000" algn="tl">
-                    <a:srgbClr val="000000">
-                      <a:alpha val="43137"/>
-                    </a:srgbClr>
-                  </a:outerShdw>
-                </a:effectLst>
-                <a:latin typeface="微軟正黑體" panose="020B0604030504040204" pitchFamily="34" charset="-120"/>
-                <a:ea typeface="微軟正黑體" panose="020B0604030504040204" pitchFamily="34" charset="-120"/>
-                <a:cs typeface="Heiti TC Light"/>
-              </a:rPr>
-              <a:t>大部分的生成式</a:t>
-            </a:r>
-            <a:r>
-              <a:rPr kumimoji="1" lang="en-US" altLang="zh-TW" sz="3200" dirty="0">
-                <a:solidFill>
-                  <a:prstClr val="white"/>
-                </a:solidFill>
-                <a:effectLst>
-                  <a:outerShdw blurRad="38100" dist="38100" dir="2700000" algn="tl">
-                    <a:srgbClr val="000000">
-                      <a:alpha val="43137"/>
-                    </a:srgbClr>
-                  </a:outerShdw>
-                </a:effectLst>
-                <a:latin typeface="微軟正黑體" panose="020B0604030504040204" pitchFamily="34" charset="-120"/>
-                <a:ea typeface="微軟正黑體" panose="020B0604030504040204" pitchFamily="34" charset="-120"/>
-                <a:cs typeface="Heiti TC Light"/>
-              </a:rPr>
-              <a:t>AI</a:t>
-            </a:r>
-            <a:r>
-              <a:rPr kumimoji="1" lang="zh-TW" altLang="en-US" sz="3200" dirty="0">
-                <a:solidFill>
-                  <a:prstClr val="white"/>
-                </a:solidFill>
-                <a:effectLst>
-                  <a:outerShdw blurRad="38100" dist="38100" dir="2700000" algn="tl">
-                    <a:srgbClr val="000000">
-                      <a:alpha val="43137"/>
-                    </a:srgbClr>
-                  </a:outerShdw>
-                </a:effectLst>
-                <a:latin typeface="微軟正黑體" panose="020B0604030504040204" pitchFamily="34" charset="-120"/>
-                <a:ea typeface="微軟正黑體" panose="020B0604030504040204" pitchFamily="34" charset="-120"/>
-                <a:cs typeface="Heiti TC Light"/>
-              </a:rPr>
-              <a:t>產品都提供</a:t>
-            </a:r>
-            <a:r>
-              <a:rPr kumimoji="1" lang="en-US" altLang="zh-TW" sz="3200" dirty="0">
-                <a:solidFill>
-                  <a:prstClr val="white"/>
-                </a:solidFill>
-                <a:effectLst>
-                  <a:outerShdw blurRad="38100" dist="38100" dir="2700000" algn="tl">
-                    <a:srgbClr val="000000">
-                      <a:alpha val="43137"/>
-                    </a:srgbClr>
-                  </a:outerShdw>
-                </a:effectLst>
-                <a:latin typeface="微軟正黑體" panose="020B0604030504040204" pitchFamily="34" charset="-120"/>
-                <a:ea typeface="微軟正黑體" panose="020B0604030504040204" pitchFamily="34" charset="-120"/>
-                <a:cs typeface="Heiti TC Light"/>
-              </a:rPr>
-              <a:t>API</a:t>
-            </a:r>
-          </a:p>
-          <a:p>
-            <a:pPr marL="514338" indent="-514338">
-              <a:buFont typeface="Arial" panose="020B0604020202020204" pitchFamily="34" charset="0"/>
-              <a:buChar char="•"/>
-            </a:pPr>
-            <a:r>
-              <a:rPr kumimoji="1" lang="zh-TW" altLang="en-US" sz="3200" dirty="0">
-                <a:solidFill>
-                  <a:prstClr val="white"/>
-                </a:solidFill>
-                <a:effectLst>
-                  <a:outerShdw blurRad="38100" dist="38100" dir="2700000" algn="tl">
-                    <a:srgbClr val="000000">
-                      <a:alpha val="43137"/>
-                    </a:srgbClr>
-                  </a:outerShdw>
-                </a:effectLst>
-                <a:latin typeface="微軟正黑體" panose="020B0604030504040204" pitchFamily="34" charset="-120"/>
-                <a:ea typeface="微軟正黑體" panose="020B0604030504040204" pitchFamily="34" charset="-120"/>
-                <a:cs typeface="Heiti TC Light"/>
-              </a:rPr>
-              <a:t>本次課程以</a:t>
-            </a:r>
-            <a:r>
-              <a:rPr kumimoji="1" lang="en-US" altLang="zh-TW" sz="3200" dirty="0">
-                <a:solidFill>
-                  <a:prstClr val="white"/>
-                </a:solidFill>
-                <a:effectLst>
-                  <a:outerShdw blurRad="38100" dist="38100" dir="2700000" algn="tl">
-                    <a:srgbClr val="000000">
-                      <a:alpha val="43137"/>
-                    </a:srgbClr>
-                  </a:outerShdw>
-                </a:effectLst>
-                <a:latin typeface="微軟正黑體" panose="020B0604030504040204" pitchFamily="34" charset="-120"/>
-                <a:ea typeface="微軟正黑體" panose="020B0604030504040204" pitchFamily="34" charset="-120"/>
-                <a:cs typeface="Heiti TC Light"/>
-              </a:rPr>
-              <a:t>Google</a:t>
-            </a:r>
-            <a:r>
-              <a:rPr kumimoji="1" lang="zh-TW" altLang="en-US" sz="3200" dirty="0">
-                <a:solidFill>
-                  <a:prstClr val="white"/>
-                </a:solidFill>
-                <a:effectLst>
-                  <a:outerShdw blurRad="38100" dist="38100" dir="2700000" algn="tl">
-                    <a:srgbClr val="000000">
-                      <a:alpha val="43137"/>
-                    </a:srgbClr>
-                  </a:outerShdw>
-                </a:effectLst>
-                <a:latin typeface="微軟正黑體" panose="020B0604030504040204" pitchFamily="34" charset="-120"/>
-                <a:ea typeface="微軟正黑體" panose="020B0604030504040204" pitchFamily="34" charset="-120"/>
-                <a:cs typeface="Heiti TC Light"/>
-              </a:rPr>
-              <a:t>的</a:t>
-            </a:r>
-            <a:r>
-              <a:rPr kumimoji="1" lang="en-US" altLang="zh-TW" sz="3200" dirty="0">
-                <a:solidFill>
-                  <a:prstClr val="white"/>
-                </a:solidFill>
-                <a:effectLst>
-                  <a:outerShdw blurRad="38100" dist="38100" dir="2700000" algn="tl">
-                    <a:srgbClr val="000000">
-                      <a:alpha val="43137"/>
-                    </a:srgbClr>
-                  </a:outerShdw>
-                </a:effectLst>
-                <a:latin typeface="微軟正黑體" panose="020B0604030504040204" pitchFamily="34" charset="-120"/>
-                <a:ea typeface="微軟正黑體" panose="020B0604030504040204" pitchFamily="34" charset="-120"/>
-                <a:cs typeface="Heiti TC Light"/>
-              </a:rPr>
-              <a:t>Gemini</a:t>
-            </a:r>
-            <a:r>
-              <a:rPr kumimoji="1" lang="zh-TW" altLang="en-US" sz="3200" dirty="0">
-                <a:solidFill>
-                  <a:prstClr val="white"/>
-                </a:solidFill>
-                <a:effectLst>
-                  <a:outerShdw blurRad="38100" dist="38100" dir="2700000" algn="tl">
-                    <a:srgbClr val="000000">
-                      <a:alpha val="43137"/>
-                    </a:srgbClr>
-                  </a:outerShdw>
-                </a:effectLst>
-                <a:latin typeface="微軟正黑體" panose="020B0604030504040204" pitchFamily="34" charset="-120"/>
-                <a:ea typeface="微軟正黑體" panose="020B0604030504040204" pitchFamily="34" charset="-120"/>
-                <a:cs typeface="Heiti TC Light"/>
-              </a:rPr>
-              <a:t>為主，使用</a:t>
-            </a:r>
-            <a:r>
-              <a:rPr kumimoji="1" lang="en-US" altLang="zh-TW" sz="3200" dirty="0">
-                <a:solidFill>
-                  <a:prstClr val="white"/>
-                </a:solidFill>
-                <a:effectLst>
-                  <a:outerShdw blurRad="38100" dist="38100" dir="2700000" algn="tl">
-                    <a:srgbClr val="000000">
-                      <a:alpha val="43137"/>
-                    </a:srgbClr>
-                  </a:outerShdw>
-                </a:effectLst>
-                <a:latin typeface="微軟正黑體" panose="020B0604030504040204" pitchFamily="34" charset="-120"/>
-                <a:ea typeface="微軟正黑體" panose="020B0604030504040204" pitchFamily="34" charset="-120"/>
-                <a:cs typeface="Heiti TC Light"/>
-              </a:rPr>
-              <a:t>API</a:t>
-            </a:r>
-            <a:r>
-              <a:rPr kumimoji="1" lang="zh-TW" altLang="en-US" sz="3200" dirty="0">
-                <a:solidFill>
-                  <a:prstClr val="white"/>
-                </a:solidFill>
-                <a:effectLst>
-                  <a:outerShdw blurRad="38100" dist="38100" dir="2700000" algn="tl">
-                    <a:srgbClr val="000000">
-                      <a:alpha val="43137"/>
-                    </a:srgbClr>
-                  </a:outerShdw>
-                </a:effectLst>
-                <a:latin typeface="微軟正黑體" panose="020B0604030504040204" pitchFamily="34" charset="-120"/>
-                <a:ea typeface="微軟正黑體" panose="020B0604030504040204" pitchFamily="34" charset="-120"/>
-                <a:cs typeface="Heiti TC Light"/>
-              </a:rPr>
-              <a:t>讓</a:t>
-            </a:r>
-            <a:r>
-              <a:rPr kumimoji="1" lang="en-US" altLang="zh-TW" sz="3200" dirty="0">
-                <a:solidFill>
-                  <a:prstClr val="white"/>
-                </a:solidFill>
-                <a:effectLst>
-                  <a:outerShdw blurRad="38100" dist="38100" dir="2700000" algn="tl">
-                    <a:srgbClr val="000000">
-                      <a:alpha val="43137"/>
-                    </a:srgbClr>
-                  </a:outerShdw>
-                </a:effectLst>
-                <a:latin typeface="微軟正黑體" panose="020B0604030504040204" pitchFamily="34" charset="-120"/>
-                <a:ea typeface="微軟正黑體" panose="020B0604030504040204" pitchFamily="34" charset="-120"/>
-                <a:cs typeface="Heiti TC Light"/>
-              </a:rPr>
-              <a:t>LINE Bot</a:t>
-            </a:r>
-            <a:r>
-              <a:rPr kumimoji="1" lang="zh-TW" altLang="en-US" sz="3200" dirty="0">
-                <a:solidFill>
-                  <a:prstClr val="white"/>
-                </a:solidFill>
-                <a:effectLst>
-                  <a:outerShdw blurRad="38100" dist="38100" dir="2700000" algn="tl">
-                    <a:srgbClr val="000000">
-                      <a:alpha val="43137"/>
-                    </a:srgbClr>
-                  </a:outerShdw>
-                </a:effectLst>
-                <a:latin typeface="微軟正黑體" panose="020B0604030504040204" pitchFamily="34" charset="-120"/>
-                <a:ea typeface="微軟正黑體" panose="020B0604030504040204" pitchFamily="34" charset="-120"/>
-                <a:cs typeface="Heiti TC Light"/>
-              </a:rPr>
-              <a:t>處理各種資訊</a:t>
-            </a:r>
-            <a:endParaRPr kumimoji="1" lang="en-US" altLang="zh-TW" sz="3200" dirty="0">
-              <a:solidFill>
-                <a:prstClr val="white"/>
-              </a:solidFill>
-              <a:effectLst>
-                <a:outerShdw blurRad="38100" dist="38100" dir="2700000" algn="tl">
-                  <a:srgbClr val="000000">
-                    <a:alpha val="43137"/>
-                  </a:srgbClr>
-                </a:outerShdw>
-              </a:effectLst>
-              <a:latin typeface="微軟正黑體" panose="020B0604030504040204" pitchFamily="34" charset="-120"/>
-              <a:ea typeface="微軟正黑體" panose="020B0604030504040204" pitchFamily="34" charset="-120"/>
-              <a:cs typeface="Heiti TC Light"/>
-            </a:endParaRPr>
-          </a:p>
-          <a:p>
-            <a:pPr marL="514338" indent="-514338">
-              <a:buFont typeface="Arial" panose="020B0604020202020204" pitchFamily="34" charset="0"/>
-              <a:buChar char="•"/>
-            </a:pPr>
-            <a:endParaRPr kumimoji="1" lang="en-US" altLang="zh-TW" sz="3200" dirty="0">
-              <a:solidFill>
-                <a:prstClr val="white"/>
-              </a:solidFill>
-              <a:effectLst>
-                <a:outerShdw blurRad="38100" dist="38100" dir="2700000" algn="tl">
-                  <a:srgbClr val="000000">
-                    <a:alpha val="43137"/>
-                  </a:srgbClr>
-                </a:outerShdw>
-              </a:effectLst>
-              <a:latin typeface="微軟正黑體" panose="020B0604030504040204" pitchFamily="34" charset="-120"/>
-              <a:ea typeface="微軟正黑體" panose="020B0604030504040204" pitchFamily="34" charset="-120"/>
-              <a:cs typeface="Heiti TC Light"/>
-            </a:endParaRPr>
-          </a:p>
-        </p:txBody>
-      </p:sp>
-      <p:sp>
-        <p:nvSpPr>
-          <p:cNvPr id="4" name="文字版面配置區 2">
-            <a:extLst>
-              <a:ext uri="{FF2B5EF4-FFF2-40B4-BE49-F238E27FC236}">
-                <a16:creationId xmlns:a16="http://schemas.microsoft.com/office/drawing/2014/main" id="{05E90DC2-7D03-1345-6CB2-352C9040FDE9}"/>
-              </a:ext>
-            </a:extLst>
-          </p:cNvPr>
-          <p:cNvSpPr txBox="1">
-            <a:spLocks/>
-          </p:cNvSpPr>
-          <p:nvPr/>
-        </p:nvSpPr>
-        <p:spPr>
-          <a:xfrm>
-            <a:off x="2118429" y="186752"/>
-            <a:ext cx="4630714" cy="990600"/>
-          </a:xfrm>
-          <a:prstGeom prst="rect">
-            <a:avLst/>
-          </a:prstGeom>
-        </p:spPr>
-        <p:txBody>
-          <a:bodyPr tIns="91440" bIns="91440" anchor="b" anchorCtr="0">
-            <a:noAutofit/>
-          </a:bodyPr>
-          <a:lstStyle/>
-          <a:p>
-            <a:pPr algn="just">
-              <a:spcBef>
-                <a:spcPct val="20000"/>
-              </a:spcBef>
-              <a:defRPr/>
-            </a:pPr>
-            <a:r>
-              <a:rPr lang="en-US" altLang="zh-TW" sz="4800" b="1" kern="0" dirty="0">
-                <a:solidFill>
-                  <a:srgbClr val="00B0F0"/>
-                </a:solidFill>
-                <a:effectLst>
-                  <a:outerShdw blurRad="38100" dist="38100" dir="2700000" algn="tl">
-                    <a:srgbClr val="000000">
-                      <a:alpha val="43137"/>
-                    </a:srgbClr>
-                  </a:outerShdw>
-                </a:effectLst>
-                <a:latin typeface="微軟正黑體" panose="020B0604030504040204" pitchFamily="34" charset="-120"/>
-                <a:ea typeface="微軟正黑體" panose="020B0604030504040204" pitchFamily="34" charset="-120"/>
-              </a:rPr>
-              <a:t>Google Gemini</a:t>
-            </a:r>
-            <a:endParaRPr lang="zh-TW" altLang="en-US" sz="4800" b="1" kern="0" dirty="0">
-              <a:solidFill>
-                <a:srgbClr val="00B0F0"/>
-              </a:solidFill>
-              <a:effectLst>
-                <a:outerShdw blurRad="38100" dist="38100" dir="2700000" algn="tl">
-                  <a:srgbClr val="000000">
-                    <a:alpha val="43137"/>
-                  </a:srgbClr>
-                </a:outerShdw>
-              </a:effectLst>
-              <a:latin typeface="微軟正黑體" panose="020B0604030504040204" pitchFamily="34" charset="-120"/>
-              <a:ea typeface="微軟正黑體" panose="020B0604030504040204" pitchFamily="34" charset="-120"/>
-            </a:endParaRPr>
-          </a:p>
-        </p:txBody>
-      </p:sp>
-    </p:spTree>
-    <p:extLst>
-      <p:ext uri="{BB962C8B-B14F-4D97-AF65-F5344CB8AC3E}">
-        <p14:creationId xmlns:p14="http://schemas.microsoft.com/office/powerpoint/2010/main" val="1451709433"/>
-      </p:ext>
-    </p:extLst>
-  </p:cSld>
-  <p:clrMapOvr>
-    <a:masterClrMapping/>
-  </p:clrMapOvr>
-  <p:transition>
-    <p:fade/>
-  </p:transition>
-</p:sld>
-</file>
-
-<file path=ppt/slides/slide13.xml><?xml version="1.0" encoding="utf-8"?>
-<p:sld xmlns:a="http://schemas.openxmlformats.org/drawingml/2006/main" xmlns:r="http://schemas.openxmlformats.org/officeDocument/2006/relationships" xmlns:p="http://schemas.openxmlformats.org/presentationml/2006/main">
-  <p:cSld>
-    <p:spTree>
-      <p:nvGrpSpPr>
         <p:cNvPr id="1" name="">
           <a:extLst>
             <a:ext uri="{FF2B5EF4-FFF2-40B4-BE49-F238E27FC236}">
@@ -17305,7 +16578,13 @@
   <p:cSld>
     <p:spTree>
       <p:nvGrpSpPr>
-        <p:cNvPr id="1" name=""/>
+        <p:cNvPr id="1" name="">
+          <a:extLst>
+            <a:ext uri="{FF2B5EF4-FFF2-40B4-BE49-F238E27FC236}">
+              <a16:creationId xmlns:a16="http://schemas.microsoft.com/office/drawing/2014/main" id="{9F58F0C6-9762-2AD0-DCC2-DFC64D7D256D}"/>
+            </a:ext>
+          </a:extLst>
+        </p:cNvPr>
         <p:cNvGrpSpPr/>
         <p:nvPr/>
       </p:nvGrpSpPr>
@@ -17317,70 +16596,78 @@
           <a:chExt cx="0" cy="0"/>
         </a:xfrm>
       </p:grpSpPr>
-      <p:pic>
-        <p:nvPicPr>
-          <p:cNvPr id="5" name="圖片 4">
+      <p:sp>
+        <p:nvSpPr>
+          <p:cNvPr id="4" name="文字方塊 3">
             <a:extLst>
               <a:ext uri="{FF2B5EF4-FFF2-40B4-BE49-F238E27FC236}">
-                <a16:creationId xmlns:a16="http://schemas.microsoft.com/office/drawing/2014/main" id="{5B7E18E7-311D-CE68-5B70-3E437A4FA5B6}"/>
+                <a16:creationId xmlns:a16="http://schemas.microsoft.com/office/drawing/2014/main" id="{F767E329-352E-C746-86B2-23CE91737E8E}"/>
               </a:ext>
             </a:extLst>
           </p:cNvPr>
-          <p:cNvPicPr>
-            <a:picLocks noChangeAspect="1"/>
-          </p:cNvPicPr>
+          <p:cNvSpPr txBox="1"/>
           <p:nvPr/>
-        </p:nvPicPr>
-        <p:blipFill>
-          <a:blip r:embed="rId2"/>
-          <a:stretch>
-            <a:fillRect/>
-          </a:stretch>
-        </p:blipFill>
+        </p:nvSpPr>
         <p:spPr>
           <a:xfrm>
-            <a:off x="82067" y="653143"/>
-            <a:ext cx="4365505" cy="4753428"/>
+            <a:off x="783076" y="3013501"/>
+            <a:ext cx="7772400" cy="830997"/>
           </a:xfrm>
           <a:prstGeom prst="rect">
             <a:avLst/>
           </a:prstGeom>
+          <a:noFill/>
         </p:spPr>
-      </p:pic>
-      <p:pic>
-        <p:nvPicPr>
-          <p:cNvPr id="7" name="圖片 6">
-            <a:extLst>
-              <a:ext uri="{FF2B5EF4-FFF2-40B4-BE49-F238E27FC236}">
-                <a16:creationId xmlns:a16="http://schemas.microsoft.com/office/drawing/2014/main" id="{ABC620DA-7403-453B-7D52-42E10F9F27A9}"/>
-              </a:ext>
-            </a:extLst>
-          </p:cNvPr>
-          <p:cNvPicPr>
-            <a:picLocks noChangeAspect="1"/>
-          </p:cNvPicPr>
-          <p:nvPr/>
-        </p:nvPicPr>
-        <p:blipFill>
-          <a:blip r:embed="rId3"/>
-          <a:stretch>
-            <a:fillRect/>
-          </a:stretch>
-        </p:blipFill>
-        <p:spPr>
-          <a:xfrm>
-            <a:off x="4572000" y="653143"/>
-            <a:ext cx="4352272" cy="4753428"/>
-          </a:xfrm>
-          <a:prstGeom prst="rect">
-            <a:avLst/>
-          </a:prstGeom>
-        </p:spPr>
-      </p:pic>
+        <p:txBody>
+          <a:bodyPr wrap="square" rtlCol="0">
+            <a:spAutoFit/>
+          </a:bodyPr>
+          <a:lstStyle/>
+          <a:p>
+            <a:pPr algn="ctr"/>
+            <a:r>
+              <a:rPr kumimoji="1" lang="en-US" altLang="zh-TW" sz="4800" b="1" dirty="0">
+                <a:solidFill>
+                  <a:srgbClr val="00B0F0"/>
+                </a:solidFill>
+                <a:effectLst>
+                  <a:outerShdw blurRad="38100" dist="38100" dir="2700000" algn="tl">
+                    <a:srgbClr val="000000">
+                      <a:alpha val="43137"/>
+                    </a:srgbClr>
+                  </a:outerShdw>
+                </a:effectLst>
+                <a:latin typeface="微軟正黑體" panose="020B0604030504040204" pitchFamily="34" charset="-120"/>
+                <a:ea typeface="微軟正黑體" panose="020B0604030504040204" pitchFamily="34" charset="-120"/>
+                <a:cs typeface="Arial"/>
+              </a:rPr>
+              <a:t>Google Gemini</a:t>
+            </a:r>
+            <a:r>
+              <a:rPr kumimoji="1" lang="zh-TW" altLang="en-US" sz="4800" b="1" dirty="0">
+                <a:solidFill>
+                  <a:srgbClr val="00B0F0"/>
+                </a:solidFill>
+                <a:effectLst>
+                  <a:outerShdw blurRad="38100" dist="38100" dir="2700000" algn="tl">
+                    <a:srgbClr val="000000">
+                      <a:alpha val="43137"/>
+                    </a:srgbClr>
+                  </a:outerShdw>
+                </a:effectLst>
+                <a:latin typeface="微軟正黑體" panose="020B0604030504040204" pitchFamily="34" charset="-120"/>
+                <a:ea typeface="微軟正黑體" panose="020B0604030504040204" pitchFamily="34" charset="-120"/>
+                <a:cs typeface="Arial"/>
+              </a:rPr>
+              <a:t>系列</a:t>
+            </a:r>
+          </a:p>
+        </p:txBody>
+      </p:sp>
     </p:spTree>
     <p:extLst>
       <p:ext uri="{BB962C8B-B14F-4D97-AF65-F5344CB8AC3E}">
-        <p14:creationId xmlns:p14="http://schemas.microsoft.com/office/powerpoint/2010/main" val="1296204468"/>
+        <p14:creationId xmlns:p14="http://schemas.microsoft.com/office/powerpoint/2010/main" val="2328856869"/>
       </p:ext>
     </p:extLst>
   </p:cSld>
@@ -17398,7 +16685,13 @@
   <p:cSld>
     <p:spTree>
       <p:nvGrpSpPr>
-        <p:cNvPr id="1" name=""/>
+        <p:cNvPr id="1" name="">
+          <a:extLst>
+            <a:ext uri="{FF2B5EF4-FFF2-40B4-BE49-F238E27FC236}">
+              <a16:creationId xmlns:a16="http://schemas.microsoft.com/office/drawing/2014/main" id="{CB70D9A2-F143-8399-8CDB-FDAA17FB3AAE}"/>
+            </a:ext>
+          </a:extLst>
+        </p:cNvPr>
         <p:cNvGrpSpPr/>
         <p:nvPr/>
       </p:nvGrpSpPr>
@@ -17410,40 +16703,525 @@
           <a:chExt cx="0" cy="0"/>
         </a:xfrm>
       </p:grpSpPr>
-      <p:pic>
-        <p:nvPicPr>
-          <p:cNvPr id="5" name="圖片 4">
+      <p:sp>
+        <p:nvSpPr>
+          <p:cNvPr id="5" name="文字方塊 4">
             <a:extLst>
               <a:ext uri="{FF2B5EF4-FFF2-40B4-BE49-F238E27FC236}">
-                <a16:creationId xmlns:a16="http://schemas.microsoft.com/office/drawing/2014/main" id="{35E0F3AE-CA87-1C00-BA1E-31C6B8C285CD}"/>
+                <a16:creationId xmlns:a16="http://schemas.microsoft.com/office/drawing/2014/main" id="{D8161B37-ADB0-A69C-B700-6552A5E4FF78}"/>
               </a:ext>
             </a:extLst>
           </p:cNvPr>
-          <p:cNvPicPr>
-            <a:picLocks noChangeAspect="1"/>
-          </p:cNvPicPr>
+          <p:cNvSpPr txBox="1"/>
           <p:nvPr/>
-        </p:nvPicPr>
-        <p:blipFill>
-          <a:blip r:embed="rId2"/>
-          <a:stretch>
-            <a:fillRect/>
-          </a:stretch>
-        </p:blipFill>
+        </p:nvSpPr>
         <p:spPr>
           <a:xfrm>
-            <a:off x="54428" y="1023111"/>
-            <a:ext cx="9035143" cy="4811777"/>
+            <a:off x="361320" y="1463047"/>
+            <a:ext cx="8499876" cy="4031873"/>
+          </a:xfrm>
+          <a:prstGeom prst="rect">
+            <a:avLst/>
+          </a:prstGeom>
+          <a:noFill/>
+        </p:spPr>
+        <p:txBody>
+          <a:bodyPr wrap="square" rtlCol="0">
+            <a:spAutoFit/>
+          </a:bodyPr>
+          <a:lstStyle/>
+          <a:p>
+            <a:pPr marL="514338" indent="-514338">
+              <a:buFont typeface="Arial" panose="020B0604020202020204" pitchFamily="34" charset="0"/>
+              <a:buChar char="•"/>
+            </a:pPr>
+            <a:r>
+              <a:rPr kumimoji="1" lang="en-US" altLang="zh-TW" sz="3200" dirty="0">
+                <a:solidFill>
+                  <a:prstClr val="white"/>
+                </a:solidFill>
+                <a:effectLst>
+                  <a:outerShdw blurRad="38100" dist="38100" dir="2700000" algn="tl">
+                    <a:srgbClr val="000000">
+                      <a:alpha val="43137"/>
+                    </a:srgbClr>
+                  </a:outerShdw>
+                </a:effectLst>
+                <a:latin typeface="微軟正黑體" panose="020B0604030504040204" pitchFamily="34" charset="-120"/>
+                <a:ea typeface="微軟正黑體" panose="020B0604030504040204" pitchFamily="34" charset="-120"/>
+                <a:cs typeface="Heiti TC Light"/>
+              </a:rPr>
+              <a:t>ChatGPT</a:t>
+            </a:r>
+            <a:r>
+              <a:rPr kumimoji="1" lang="zh-TW" altLang="en-US" sz="3200" dirty="0">
+                <a:solidFill>
+                  <a:prstClr val="white"/>
+                </a:solidFill>
+                <a:effectLst>
+                  <a:outerShdw blurRad="38100" dist="38100" dir="2700000" algn="tl">
+                    <a:srgbClr val="000000">
+                      <a:alpha val="43137"/>
+                    </a:srgbClr>
+                  </a:outerShdw>
+                </a:effectLst>
+                <a:latin typeface="微軟正黑體" panose="020B0604030504040204" pitchFamily="34" charset="-120"/>
+                <a:ea typeface="微軟正黑體" panose="020B0604030504040204" pitchFamily="34" charset="-120"/>
+                <a:cs typeface="Heiti TC Light"/>
+              </a:rPr>
+              <a:t>就是一個依靠生成式模型的應用程式，主要是提供聊天式對話</a:t>
+            </a:r>
+            <a:endParaRPr kumimoji="1" lang="en-US" altLang="zh-TW" sz="3200" dirty="0">
+              <a:solidFill>
+                <a:prstClr val="white"/>
+              </a:solidFill>
+              <a:effectLst>
+                <a:outerShdw blurRad="38100" dist="38100" dir="2700000" algn="tl">
+                  <a:srgbClr val="000000">
+                    <a:alpha val="43137"/>
+                  </a:srgbClr>
+                </a:outerShdw>
+              </a:effectLst>
+              <a:latin typeface="微軟正黑體" panose="020B0604030504040204" pitchFamily="34" charset="-120"/>
+              <a:ea typeface="微軟正黑體" panose="020B0604030504040204" pitchFamily="34" charset="-120"/>
+              <a:cs typeface="Heiti TC Light"/>
+            </a:endParaRPr>
+          </a:p>
+          <a:p>
+            <a:pPr marL="514338" indent="-514338">
+              <a:buFont typeface="Arial" panose="020B0604020202020204" pitchFamily="34" charset="0"/>
+              <a:buChar char="•"/>
+            </a:pPr>
+            <a:r>
+              <a:rPr kumimoji="1" lang="zh-TW" altLang="en-US" sz="3200" dirty="0">
+                <a:solidFill>
+                  <a:prstClr val="white"/>
+                </a:solidFill>
+                <a:effectLst>
+                  <a:outerShdw blurRad="38100" dist="38100" dir="2700000" algn="tl">
+                    <a:srgbClr val="000000">
+                      <a:alpha val="43137"/>
+                    </a:srgbClr>
+                  </a:outerShdw>
+                </a:effectLst>
+                <a:latin typeface="微軟正黑體" panose="020B0604030504040204" pitchFamily="34" charset="-120"/>
+                <a:ea typeface="微軟正黑體" panose="020B0604030504040204" pitchFamily="34" charset="-120"/>
+                <a:cs typeface="Heiti TC Light"/>
+              </a:rPr>
+              <a:t>可以不透過</a:t>
+            </a:r>
+            <a:r>
+              <a:rPr kumimoji="1" lang="en-US" altLang="zh-TW" sz="3200" dirty="0">
+                <a:solidFill>
+                  <a:prstClr val="white"/>
+                </a:solidFill>
+                <a:effectLst>
+                  <a:outerShdw blurRad="38100" dist="38100" dir="2700000" algn="tl">
+                    <a:srgbClr val="000000">
+                      <a:alpha val="43137"/>
+                    </a:srgbClr>
+                  </a:outerShdw>
+                </a:effectLst>
+                <a:latin typeface="微軟正黑體" panose="020B0604030504040204" pitchFamily="34" charset="-120"/>
+                <a:ea typeface="微軟正黑體" panose="020B0604030504040204" pitchFamily="34" charset="-120"/>
+                <a:cs typeface="Heiti TC Light"/>
+              </a:rPr>
+              <a:t>Chat</a:t>
+            </a:r>
+            <a:r>
+              <a:rPr kumimoji="1" lang="zh-TW" altLang="en-US" sz="3200" dirty="0">
+                <a:solidFill>
+                  <a:prstClr val="white"/>
+                </a:solidFill>
+                <a:effectLst>
+                  <a:outerShdw blurRad="38100" dist="38100" dir="2700000" algn="tl">
+                    <a:srgbClr val="000000">
+                      <a:alpha val="43137"/>
+                    </a:srgbClr>
+                  </a:outerShdw>
+                </a:effectLst>
+                <a:latin typeface="微軟正黑體" panose="020B0604030504040204" pitchFamily="34" charset="-120"/>
+                <a:ea typeface="微軟正黑體" panose="020B0604030504040204" pitchFamily="34" charset="-120"/>
+                <a:cs typeface="Heiti TC Light"/>
+              </a:rPr>
+              <a:t>介面，直接用程式語言的方式讓模型產生結果，必須使用</a:t>
+            </a:r>
+            <a:r>
+              <a:rPr kumimoji="1" lang="en-US" altLang="zh-TW" sz="3200" dirty="0">
+                <a:solidFill>
+                  <a:prstClr val="white"/>
+                </a:solidFill>
+                <a:effectLst>
+                  <a:outerShdw blurRad="38100" dist="38100" dir="2700000" algn="tl">
+                    <a:srgbClr val="000000">
+                      <a:alpha val="43137"/>
+                    </a:srgbClr>
+                  </a:outerShdw>
+                </a:effectLst>
+                <a:latin typeface="微軟正黑體" panose="020B0604030504040204" pitchFamily="34" charset="-120"/>
+                <a:ea typeface="微軟正黑體" panose="020B0604030504040204" pitchFamily="34" charset="-120"/>
+                <a:cs typeface="Heiti TC Light"/>
+              </a:rPr>
+              <a:t>API</a:t>
+            </a:r>
+          </a:p>
+          <a:p>
+            <a:pPr marL="514338" indent="-514338">
+              <a:buFont typeface="Arial" panose="020B0604020202020204" pitchFamily="34" charset="0"/>
+              <a:buChar char="•"/>
+            </a:pPr>
+            <a:r>
+              <a:rPr kumimoji="1" lang="zh-TW" altLang="en-US" sz="3200" dirty="0">
+                <a:solidFill>
+                  <a:prstClr val="white"/>
+                </a:solidFill>
+                <a:effectLst>
+                  <a:outerShdw blurRad="38100" dist="38100" dir="2700000" algn="tl">
+                    <a:srgbClr val="000000">
+                      <a:alpha val="43137"/>
+                    </a:srgbClr>
+                  </a:outerShdw>
+                </a:effectLst>
+                <a:latin typeface="微軟正黑體" panose="020B0604030504040204" pitchFamily="34" charset="-120"/>
+                <a:ea typeface="微軟正黑體" panose="020B0604030504040204" pitchFamily="34" charset="-120"/>
+                <a:cs typeface="Heiti TC Light"/>
+              </a:rPr>
+              <a:t>大部分的生成式</a:t>
+            </a:r>
+            <a:r>
+              <a:rPr kumimoji="1" lang="en-US" altLang="zh-TW" sz="3200" dirty="0">
+                <a:solidFill>
+                  <a:prstClr val="white"/>
+                </a:solidFill>
+                <a:effectLst>
+                  <a:outerShdw blurRad="38100" dist="38100" dir="2700000" algn="tl">
+                    <a:srgbClr val="000000">
+                      <a:alpha val="43137"/>
+                    </a:srgbClr>
+                  </a:outerShdw>
+                </a:effectLst>
+                <a:latin typeface="微軟正黑體" panose="020B0604030504040204" pitchFamily="34" charset="-120"/>
+                <a:ea typeface="微軟正黑體" panose="020B0604030504040204" pitchFamily="34" charset="-120"/>
+                <a:cs typeface="Heiti TC Light"/>
+              </a:rPr>
+              <a:t>AI</a:t>
+            </a:r>
+            <a:r>
+              <a:rPr kumimoji="1" lang="zh-TW" altLang="en-US" sz="3200" dirty="0">
+                <a:solidFill>
+                  <a:prstClr val="white"/>
+                </a:solidFill>
+                <a:effectLst>
+                  <a:outerShdw blurRad="38100" dist="38100" dir="2700000" algn="tl">
+                    <a:srgbClr val="000000">
+                      <a:alpha val="43137"/>
+                    </a:srgbClr>
+                  </a:outerShdw>
+                </a:effectLst>
+                <a:latin typeface="微軟正黑體" panose="020B0604030504040204" pitchFamily="34" charset="-120"/>
+                <a:ea typeface="微軟正黑體" panose="020B0604030504040204" pitchFamily="34" charset="-120"/>
+                <a:cs typeface="Heiti TC Light"/>
+              </a:rPr>
+              <a:t>產品都提供</a:t>
+            </a:r>
+            <a:r>
+              <a:rPr kumimoji="1" lang="en-US" altLang="zh-TW" sz="3200" dirty="0">
+                <a:solidFill>
+                  <a:prstClr val="white"/>
+                </a:solidFill>
+                <a:effectLst>
+                  <a:outerShdw blurRad="38100" dist="38100" dir="2700000" algn="tl">
+                    <a:srgbClr val="000000">
+                      <a:alpha val="43137"/>
+                    </a:srgbClr>
+                  </a:outerShdw>
+                </a:effectLst>
+                <a:latin typeface="微軟正黑體" panose="020B0604030504040204" pitchFamily="34" charset="-120"/>
+                <a:ea typeface="微軟正黑體" panose="020B0604030504040204" pitchFamily="34" charset="-120"/>
+                <a:cs typeface="Heiti TC Light"/>
+              </a:rPr>
+              <a:t>API</a:t>
+            </a:r>
+          </a:p>
+          <a:p>
+            <a:pPr marL="514338" indent="-514338">
+              <a:buFont typeface="Arial" panose="020B0604020202020204" pitchFamily="34" charset="0"/>
+              <a:buChar char="•"/>
+            </a:pPr>
+            <a:r>
+              <a:rPr kumimoji="1" lang="zh-TW" altLang="en-US" sz="3200" dirty="0">
+                <a:solidFill>
+                  <a:prstClr val="white"/>
+                </a:solidFill>
+                <a:effectLst>
+                  <a:outerShdw blurRad="38100" dist="38100" dir="2700000" algn="tl">
+                    <a:srgbClr val="000000">
+                      <a:alpha val="43137"/>
+                    </a:srgbClr>
+                  </a:outerShdw>
+                </a:effectLst>
+                <a:latin typeface="微軟正黑體" panose="020B0604030504040204" pitchFamily="34" charset="-120"/>
+                <a:ea typeface="微軟正黑體" panose="020B0604030504040204" pitchFamily="34" charset="-120"/>
+                <a:cs typeface="Heiti TC Light"/>
+              </a:rPr>
+              <a:t>本次課程以</a:t>
+            </a:r>
+            <a:r>
+              <a:rPr kumimoji="1" lang="en-US" altLang="zh-TW" sz="3200" dirty="0">
+                <a:solidFill>
+                  <a:prstClr val="white"/>
+                </a:solidFill>
+                <a:effectLst>
+                  <a:outerShdw blurRad="38100" dist="38100" dir="2700000" algn="tl">
+                    <a:srgbClr val="000000">
+                      <a:alpha val="43137"/>
+                    </a:srgbClr>
+                  </a:outerShdw>
+                </a:effectLst>
+                <a:latin typeface="微軟正黑體" panose="020B0604030504040204" pitchFamily="34" charset="-120"/>
+                <a:ea typeface="微軟正黑體" panose="020B0604030504040204" pitchFamily="34" charset="-120"/>
+                <a:cs typeface="Heiti TC Light"/>
+              </a:rPr>
+              <a:t>Google</a:t>
+            </a:r>
+            <a:r>
+              <a:rPr kumimoji="1" lang="zh-TW" altLang="en-US" sz="3200" dirty="0">
+                <a:solidFill>
+                  <a:prstClr val="white"/>
+                </a:solidFill>
+                <a:effectLst>
+                  <a:outerShdw blurRad="38100" dist="38100" dir="2700000" algn="tl">
+                    <a:srgbClr val="000000">
+                      <a:alpha val="43137"/>
+                    </a:srgbClr>
+                  </a:outerShdw>
+                </a:effectLst>
+                <a:latin typeface="微軟正黑體" panose="020B0604030504040204" pitchFamily="34" charset="-120"/>
+                <a:ea typeface="微軟正黑體" panose="020B0604030504040204" pitchFamily="34" charset="-120"/>
+                <a:cs typeface="Heiti TC Light"/>
+              </a:rPr>
+              <a:t>的</a:t>
+            </a:r>
+            <a:r>
+              <a:rPr kumimoji="1" lang="en-US" altLang="zh-TW" sz="3200" dirty="0">
+                <a:solidFill>
+                  <a:prstClr val="white"/>
+                </a:solidFill>
+                <a:effectLst>
+                  <a:outerShdw blurRad="38100" dist="38100" dir="2700000" algn="tl">
+                    <a:srgbClr val="000000">
+                      <a:alpha val="43137"/>
+                    </a:srgbClr>
+                  </a:outerShdw>
+                </a:effectLst>
+                <a:latin typeface="微軟正黑體" panose="020B0604030504040204" pitchFamily="34" charset="-120"/>
+                <a:ea typeface="微軟正黑體" panose="020B0604030504040204" pitchFamily="34" charset="-120"/>
+                <a:cs typeface="Heiti TC Light"/>
+              </a:rPr>
+              <a:t>Gemini</a:t>
+            </a:r>
+            <a:r>
+              <a:rPr kumimoji="1" lang="zh-TW" altLang="en-US" sz="3200" dirty="0">
+                <a:solidFill>
+                  <a:prstClr val="white"/>
+                </a:solidFill>
+                <a:effectLst>
+                  <a:outerShdw blurRad="38100" dist="38100" dir="2700000" algn="tl">
+                    <a:srgbClr val="000000">
+                      <a:alpha val="43137"/>
+                    </a:srgbClr>
+                  </a:outerShdw>
+                </a:effectLst>
+                <a:latin typeface="微軟正黑體" panose="020B0604030504040204" pitchFamily="34" charset="-120"/>
+                <a:ea typeface="微軟正黑體" panose="020B0604030504040204" pitchFamily="34" charset="-120"/>
+                <a:cs typeface="Heiti TC Light"/>
+              </a:rPr>
+              <a:t>為主，使用</a:t>
+            </a:r>
+            <a:r>
+              <a:rPr kumimoji="1" lang="en-US" altLang="zh-TW" sz="3200" dirty="0">
+                <a:solidFill>
+                  <a:prstClr val="white"/>
+                </a:solidFill>
+                <a:effectLst>
+                  <a:outerShdw blurRad="38100" dist="38100" dir="2700000" algn="tl">
+                    <a:srgbClr val="000000">
+                      <a:alpha val="43137"/>
+                    </a:srgbClr>
+                  </a:outerShdw>
+                </a:effectLst>
+                <a:latin typeface="微軟正黑體" panose="020B0604030504040204" pitchFamily="34" charset="-120"/>
+                <a:ea typeface="微軟正黑體" panose="020B0604030504040204" pitchFamily="34" charset="-120"/>
+                <a:cs typeface="Heiti TC Light"/>
+              </a:rPr>
+              <a:t>API</a:t>
+            </a:r>
+            <a:r>
+              <a:rPr kumimoji="1" lang="zh-TW" altLang="en-US" sz="3200" dirty="0">
+                <a:solidFill>
+                  <a:prstClr val="white"/>
+                </a:solidFill>
+                <a:effectLst>
+                  <a:outerShdw blurRad="38100" dist="38100" dir="2700000" algn="tl">
+                    <a:srgbClr val="000000">
+                      <a:alpha val="43137"/>
+                    </a:srgbClr>
+                  </a:outerShdw>
+                </a:effectLst>
+                <a:latin typeface="微軟正黑體" panose="020B0604030504040204" pitchFamily="34" charset="-120"/>
+                <a:ea typeface="微軟正黑體" panose="020B0604030504040204" pitchFamily="34" charset="-120"/>
+                <a:cs typeface="Heiti TC Light"/>
+              </a:rPr>
+              <a:t>讓</a:t>
+            </a:r>
+            <a:r>
+              <a:rPr kumimoji="1" lang="en-US" altLang="zh-TW" sz="3200" dirty="0">
+                <a:solidFill>
+                  <a:prstClr val="white"/>
+                </a:solidFill>
+                <a:effectLst>
+                  <a:outerShdw blurRad="38100" dist="38100" dir="2700000" algn="tl">
+                    <a:srgbClr val="000000">
+                      <a:alpha val="43137"/>
+                    </a:srgbClr>
+                  </a:outerShdw>
+                </a:effectLst>
+                <a:latin typeface="微軟正黑體" panose="020B0604030504040204" pitchFamily="34" charset="-120"/>
+                <a:ea typeface="微軟正黑體" panose="020B0604030504040204" pitchFamily="34" charset="-120"/>
+                <a:cs typeface="Heiti TC Light"/>
+              </a:rPr>
+              <a:t>LINE Bot</a:t>
+            </a:r>
+            <a:r>
+              <a:rPr kumimoji="1" lang="zh-TW" altLang="en-US" sz="3200" dirty="0">
+                <a:solidFill>
+                  <a:prstClr val="white"/>
+                </a:solidFill>
+                <a:effectLst>
+                  <a:outerShdw blurRad="38100" dist="38100" dir="2700000" algn="tl">
+                    <a:srgbClr val="000000">
+                      <a:alpha val="43137"/>
+                    </a:srgbClr>
+                  </a:outerShdw>
+                </a:effectLst>
+                <a:latin typeface="微軟正黑體" panose="020B0604030504040204" pitchFamily="34" charset="-120"/>
+                <a:ea typeface="微軟正黑體" panose="020B0604030504040204" pitchFamily="34" charset="-120"/>
+                <a:cs typeface="Heiti TC Light"/>
+              </a:rPr>
+              <a:t>處理各種資訊</a:t>
+            </a:r>
+            <a:endParaRPr kumimoji="1" lang="en-US" altLang="zh-TW" sz="3200" dirty="0">
+              <a:solidFill>
+                <a:prstClr val="white"/>
+              </a:solidFill>
+              <a:effectLst>
+                <a:outerShdw blurRad="38100" dist="38100" dir="2700000" algn="tl">
+                  <a:srgbClr val="000000">
+                    <a:alpha val="43137"/>
+                  </a:srgbClr>
+                </a:outerShdw>
+              </a:effectLst>
+              <a:latin typeface="微軟正黑體" panose="020B0604030504040204" pitchFamily="34" charset="-120"/>
+              <a:ea typeface="微軟正黑體" panose="020B0604030504040204" pitchFamily="34" charset="-120"/>
+              <a:cs typeface="Heiti TC Light"/>
+            </a:endParaRPr>
+          </a:p>
+          <a:p>
+            <a:pPr marL="514338" indent="-514338">
+              <a:buFont typeface="Arial" panose="020B0604020202020204" pitchFamily="34" charset="0"/>
+              <a:buChar char="•"/>
+            </a:pPr>
+            <a:endParaRPr kumimoji="1" lang="en-US" altLang="zh-TW" sz="3200" dirty="0">
+              <a:solidFill>
+                <a:prstClr val="white"/>
+              </a:solidFill>
+              <a:effectLst>
+                <a:outerShdw blurRad="38100" dist="38100" dir="2700000" algn="tl">
+                  <a:srgbClr val="000000">
+                    <a:alpha val="43137"/>
+                  </a:srgbClr>
+                </a:outerShdw>
+              </a:effectLst>
+              <a:latin typeface="微軟正黑體" panose="020B0604030504040204" pitchFamily="34" charset="-120"/>
+              <a:ea typeface="微軟正黑體" panose="020B0604030504040204" pitchFamily="34" charset="-120"/>
+              <a:cs typeface="Heiti TC Light"/>
+            </a:endParaRPr>
+          </a:p>
+        </p:txBody>
+      </p:sp>
+      <p:sp>
+        <p:nvSpPr>
+          <p:cNvPr id="4" name="文字版面配置區 2">
+            <a:extLst>
+              <a:ext uri="{FF2B5EF4-FFF2-40B4-BE49-F238E27FC236}">
+                <a16:creationId xmlns:a16="http://schemas.microsoft.com/office/drawing/2014/main" id="{05E90DC2-7D03-1345-6CB2-352C9040FDE9}"/>
+              </a:ext>
+            </a:extLst>
+          </p:cNvPr>
+          <p:cNvSpPr txBox="1">
+            <a:spLocks/>
+          </p:cNvSpPr>
+          <p:nvPr/>
+        </p:nvSpPr>
+        <p:spPr>
+          <a:xfrm>
+            <a:off x="2118429" y="186752"/>
+            <a:ext cx="4630714" cy="990600"/>
           </a:xfrm>
           <a:prstGeom prst="rect">
             <a:avLst/>
           </a:prstGeom>
         </p:spPr>
-      </p:pic>
+        <p:txBody>
+          <a:bodyPr tIns="91440" bIns="91440" anchor="b" anchorCtr="0">
+            <a:noAutofit/>
+          </a:bodyPr>
+          <a:lstStyle/>
+          <a:p>
+            <a:pPr algn="just">
+              <a:spcBef>
+                <a:spcPct val="20000"/>
+              </a:spcBef>
+              <a:defRPr/>
+            </a:pPr>
+            <a:r>
+              <a:rPr lang="en-US" altLang="zh-TW" sz="4800" b="1" kern="0" dirty="0">
+                <a:solidFill>
+                  <a:srgbClr val="00B0F0"/>
+                </a:solidFill>
+                <a:effectLst>
+                  <a:outerShdw blurRad="38100" dist="38100" dir="2700000" algn="tl">
+                    <a:srgbClr val="000000">
+                      <a:alpha val="43137"/>
+                    </a:srgbClr>
+                  </a:outerShdw>
+                </a:effectLst>
+                <a:latin typeface="微軟正黑體" panose="020B0604030504040204" pitchFamily="34" charset="-120"/>
+                <a:ea typeface="微軟正黑體" panose="020B0604030504040204" pitchFamily="34" charset="-120"/>
+              </a:rPr>
+              <a:t>Google Gemini</a:t>
+            </a:r>
+            <a:endParaRPr lang="zh-TW" altLang="en-US" sz="4800" b="1" kern="0" dirty="0">
+              <a:solidFill>
+                <a:srgbClr val="00B0F0"/>
+              </a:solidFill>
+              <a:effectLst>
+                <a:outerShdw blurRad="38100" dist="38100" dir="2700000" algn="tl">
+                  <a:srgbClr val="000000">
+                    <a:alpha val="43137"/>
+                  </a:srgbClr>
+                </a:outerShdw>
+              </a:effectLst>
+              <a:latin typeface="微軟正黑體" panose="020B0604030504040204" pitchFamily="34" charset="-120"/>
+              <a:ea typeface="微軟正黑體" panose="020B0604030504040204" pitchFamily="34" charset="-120"/>
+            </a:endParaRPr>
+          </a:p>
+        </p:txBody>
+      </p:sp>
     </p:spTree>
     <p:extLst>
       <p:ext uri="{BB962C8B-B14F-4D97-AF65-F5344CB8AC3E}">
-        <p14:creationId xmlns:p14="http://schemas.microsoft.com/office/powerpoint/2010/main" val="3768463329"/>
+        <p14:creationId xmlns:p14="http://schemas.microsoft.com/office/powerpoint/2010/main" val="1451709433"/>
       </p:ext>
     </p:extLst>
   </p:cSld>
@@ -17454,4 +17232,889 @@
     <p:fade/>
   </p:transition>
 </p:sld>
+</file>
+
+<file path=ppt/theme/theme1.xml><?xml version="1.0" encoding="utf-8"?>
+<a:theme xmlns:a="http://schemas.openxmlformats.org/drawingml/2006/main" name="Office 佈景主題">
+  <a:themeElements>
+    <a:clrScheme name="Office">
+      <a:dk1>
+        <a:sysClr val="windowText" lastClr="000000"/>
+      </a:dk1>
+      <a:lt1>
+        <a:sysClr val="window" lastClr="FFFFFF"/>
+      </a:lt1>
+      <a:dk2>
+        <a:srgbClr val="44546A"/>
+      </a:dk2>
+      <a:lt2>
+        <a:srgbClr val="E7E6E6"/>
+      </a:lt2>
+      <a:accent1>
+        <a:srgbClr val="4472C4"/>
+      </a:accent1>
+      <a:accent2>
+        <a:srgbClr val="ED7D31"/>
+      </a:accent2>
+      <a:accent3>
+        <a:srgbClr val="A5A5A5"/>
+      </a:accent3>
+      <a:accent4>
+        <a:srgbClr val="FFC000"/>
+      </a:accent4>
+      <a:accent5>
+        <a:srgbClr val="5B9BD5"/>
+      </a:accent5>
+      <a:accent6>
+        <a:srgbClr val="70AD47"/>
+      </a:accent6>
+      <a:hlink>
+        <a:srgbClr val="0563C1"/>
+      </a:hlink>
+      <a:folHlink>
+        <a:srgbClr val="954F72"/>
+      </a:folHlink>
+    </a:clrScheme>
+    <a:fontScheme name="Office">
+      <a:majorFont>
+        <a:latin typeface="Calibri Light" panose="020F0302020204030204"/>
+        <a:ea typeface=""/>
+        <a:cs typeface=""/>
+        <a:font script="Jpan" typeface="游ゴシック Light"/>
+        <a:font script="Hang" typeface="맑은 고딕"/>
+        <a:font script="Hans" typeface="等线 Light"/>
+        <a:font script="Hant" typeface="新細明體"/>
+        <a:font script="Arab" typeface="Times New Roman"/>
+        <a:font script="Hebr" typeface="Times New Roman"/>
+        <a:font script="Thai" typeface="Angsana New"/>
+        <a:font script="Ethi" typeface="Nyala"/>
+        <a:font script="Beng" typeface="Vrinda"/>
+        <a:font script="Gujr" typeface="Shruti"/>
+        <a:font script="Khmr" typeface="MoolBoran"/>
+        <a:font script="Knda" typeface="Tunga"/>
+        <a:font script="Guru" typeface="Raavi"/>
+        <a:font script="Cans" typeface="Euphemia"/>
+        <a:font script="Cher" typeface="Plantagenet Cherokee"/>
+        <a:font script="Yiii" typeface="Microsoft Yi Baiti"/>
+        <a:font script="Tibt" typeface="Microsoft Himalaya"/>
+        <a:font script="Thaa" typeface="MV Boli"/>
+        <a:font script="Deva" typeface="Mangal"/>
+        <a:font script="Telu" typeface="Gautami"/>
+        <a:font script="Taml" typeface="Latha"/>
+        <a:font script="Syrc" typeface="Estrangelo Edessa"/>
+        <a:font script="Orya" typeface="Kalinga"/>
+        <a:font script="Mlym" typeface="Kartika"/>
+        <a:font script="Laoo" typeface="DokChampa"/>
+        <a:font script="Sinh" typeface="Iskoola Pota"/>
+        <a:font script="Mong" typeface="Mongolian Baiti"/>
+        <a:font script="Viet" typeface="Times New Roman"/>
+        <a:font script="Uigh" typeface="Microsoft Uighur"/>
+        <a:font script="Geor" typeface="Sylfaen"/>
+        <a:font script="Armn" typeface="Arial"/>
+        <a:font script="Bugi" typeface="Leelawadee UI"/>
+        <a:font script="Bopo" typeface="Microsoft JhengHei"/>
+        <a:font script="Java" typeface="Javanese Text"/>
+        <a:font script="Lisu" typeface="Segoe UI"/>
+        <a:font script="Mymr" typeface="Myanmar Text"/>
+        <a:font script="Nkoo" typeface="Ebrima"/>
+        <a:font script="Olck" typeface="Nirmala UI"/>
+        <a:font script="Osma" typeface="Ebrima"/>
+        <a:font script="Phag" typeface="Phagspa"/>
+        <a:font script="Syrn" typeface="Estrangelo Edessa"/>
+        <a:font script="Syrj" typeface="Estrangelo Edessa"/>
+        <a:font script="Syre" typeface="Estrangelo Edessa"/>
+        <a:font script="Sora" typeface="Nirmala UI"/>
+        <a:font script="Tale" typeface="Microsoft Tai Le"/>
+        <a:font script="Talu" typeface="Microsoft New Tai Lue"/>
+        <a:font script="Tfng" typeface="Ebrima"/>
+      </a:majorFont>
+      <a:minorFont>
+        <a:latin typeface="Calibri" panose="020F0502020204030204"/>
+        <a:ea typeface=""/>
+        <a:cs typeface=""/>
+        <a:font script="Jpan" typeface="游ゴシック"/>
+        <a:font script="Hang" typeface="맑은 고딕"/>
+        <a:font script="Hans" typeface="等线"/>
+        <a:font script="Hant" typeface="新細明體"/>
+        <a:font script="Arab" typeface="Arial"/>
+        <a:font script="Hebr" typeface="Arial"/>
+        <a:font script="Thai" typeface="Cordia New"/>
+        <a:font script="Ethi" typeface="Nyala"/>
+        <a:font script="Beng" typeface="Vrinda"/>
+        <a:font script="Gujr" typeface="Shruti"/>
+        <a:font script="Khmr" typeface="DaunPenh"/>
+        <a:font script="Knda" typeface="Tunga"/>
+        <a:font script="Guru" typeface="Raavi"/>
+        <a:font script="Cans" typeface="Euphemia"/>
+        <a:font script="Cher" typeface="Plantagenet Cherokee"/>
+        <a:font script="Yiii" typeface="Microsoft Yi Baiti"/>
+        <a:font script="Tibt" typeface="Microsoft Himalaya"/>
+        <a:font script="Thaa" typeface="MV Boli"/>
+        <a:font script="Deva" typeface="Mangal"/>
+        <a:font script="Telu" typeface="Gautami"/>
+        <a:font script="Taml" typeface="Latha"/>
+        <a:font script="Syrc" typeface="Estrangelo Edessa"/>
+        <a:font script="Orya" typeface="Kalinga"/>
+        <a:font script="Mlym" typeface="Kartika"/>
+        <a:font script="Laoo" typeface="DokChampa"/>
+        <a:font script="Sinh" typeface="Iskoola Pota"/>
+        <a:font script="Mong" typeface="Mongolian Baiti"/>
+        <a:font script="Viet" typeface="Arial"/>
+        <a:font script="Uigh" typeface="Microsoft Uighur"/>
+        <a:font script="Geor" typeface="Sylfaen"/>
+        <a:font script="Armn" typeface="Arial"/>
+        <a:font script="Bugi" typeface="Leelawadee UI"/>
+        <a:font script="Bopo" typeface="Microsoft JhengHei"/>
+        <a:font script="Java" typeface="Javanese Text"/>
+        <a:font script="Lisu" typeface="Segoe UI"/>
+        <a:font script="Mymr" typeface="Myanmar Text"/>
+        <a:font script="Nkoo" typeface="Ebrima"/>
+        <a:font script="Olck" typeface="Nirmala UI"/>
+        <a:font script="Osma" typeface="Ebrima"/>
+        <a:font script="Phag" typeface="Phagspa"/>
+        <a:font script="Syrn" typeface="Estrangelo Edessa"/>
+        <a:font script="Syrj" typeface="Estrangelo Edessa"/>
+        <a:font script="Syre" typeface="Estrangelo Edessa"/>
+        <a:font script="Sora" typeface="Nirmala UI"/>
+        <a:font script="Tale" typeface="Microsoft Tai Le"/>
+        <a:font script="Talu" typeface="Microsoft New Tai Lue"/>
+        <a:font script="Tfng" typeface="Ebrima"/>
+      </a:minorFont>
+    </a:fontScheme>
+    <a:fmtScheme name="Office">
+      <a:fillStyleLst>
+        <a:solidFill>
+          <a:schemeClr val="phClr"/>
+        </a:solidFill>
+        <a:gradFill rotWithShape="1">
+          <a:gsLst>
+            <a:gs pos="0">
+              <a:schemeClr val="phClr">
+                <a:lumMod val="110000"/>
+                <a:satMod val="105000"/>
+                <a:tint val="67000"/>
+              </a:schemeClr>
+            </a:gs>
+            <a:gs pos="50000">
+              <a:schemeClr val="phClr">
+                <a:lumMod val="105000"/>
+                <a:satMod val="103000"/>
+                <a:tint val="73000"/>
+              </a:schemeClr>
+            </a:gs>
+            <a:gs pos="100000">
+              <a:schemeClr val="phClr">
+                <a:lumMod val="105000"/>
+                <a:satMod val="109000"/>
+                <a:tint val="81000"/>
+              </a:schemeClr>
+            </a:gs>
+          </a:gsLst>
+          <a:lin ang="5400000" scaled="0"/>
+        </a:gradFill>
+        <a:gradFill rotWithShape="1">
+          <a:gsLst>
+            <a:gs pos="0">
+              <a:schemeClr val="phClr">
+                <a:satMod val="103000"/>
+                <a:lumMod val="102000"/>
+                <a:tint val="94000"/>
+              </a:schemeClr>
+            </a:gs>
+            <a:gs pos="50000">
+              <a:schemeClr val="phClr">
+                <a:satMod val="110000"/>
+                <a:lumMod val="100000"/>
+                <a:shade val="100000"/>
+              </a:schemeClr>
+            </a:gs>
+            <a:gs pos="100000">
+              <a:schemeClr val="phClr">
+                <a:lumMod val="99000"/>
+                <a:satMod val="120000"/>
+                <a:shade val="78000"/>
+              </a:schemeClr>
+            </a:gs>
+          </a:gsLst>
+          <a:lin ang="5400000" scaled="0"/>
+        </a:gradFill>
+      </a:fillStyleLst>
+      <a:lnStyleLst>
+        <a:ln w="6350" cap="flat" cmpd="sng" algn="ctr">
+          <a:solidFill>
+            <a:schemeClr val="phClr"/>
+          </a:solidFill>
+          <a:prstDash val="solid"/>
+          <a:miter lim="800000"/>
+        </a:ln>
+        <a:ln w="12700" cap="flat" cmpd="sng" algn="ctr">
+          <a:solidFill>
+            <a:schemeClr val="phClr"/>
+          </a:solidFill>
+          <a:prstDash val="solid"/>
+          <a:miter lim="800000"/>
+        </a:ln>
+        <a:ln w="19050" cap="flat" cmpd="sng" algn="ctr">
+          <a:solidFill>
+            <a:schemeClr val="phClr"/>
+          </a:solidFill>
+          <a:prstDash val="solid"/>
+          <a:miter lim="800000"/>
+        </a:ln>
+      </a:lnStyleLst>
+      <a:effectStyleLst>
+        <a:effectStyle>
+          <a:effectLst/>
+        </a:effectStyle>
+        <a:effectStyle>
+          <a:effectLst/>
+        </a:effectStyle>
+        <a:effectStyle>
+          <a:effectLst>
+            <a:outerShdw blurRad="57150" dist="19050" dir="5400000" algn="ctr" rotWithShape="0">
+              <a:srgbClr val="000000">
+                <a:alpha val="63000"/>
+              </a:srgbClr>
+            </a:outerShdw>
+          </a:effectLst>
+        </a:effectStyle>
+      </a:effectStyleLst>
+      <a:bgFillStyleLst>
+        <a:solidFill>
+          <a:schemeClr val="phClr"/>
+        </a:solidFill>
+        <a:solidFill>
+          <a:schemeClr val="phClr">
+            <a:tint val="95000"/>
+            <a:satMod val="170000"/>
+          </a:schemeClr>
+        </a:solidFill>
+        <a:gradFill rotWithShape="1">
+          <a:gsLst>
+            <a:gs pos="0">
+              <a:schemeClr val="phClr">
+                <a:tint val="93000"/>
+                <a:satMod val="150000"/>
+                <a:shade val="98000"/>
+                <a:lumMod val="102000"/>
+              </a:schemeClr>
+            </a:gs>
+            <a:gs pos="50000">
+              <a:schemeClr val="phClr">
+                <a:tint val="98000"/>
+                <a:satMod val="130000"/>
+                <a:shade val="90000"/>
+                <a:lumMod val="103000"/>
+              </a:schemeClr>
+            </a:gs>
+            <a:gs pos="100000">
+              <a:schemeClr val="phClr">
+                <a:shade val="63000"/>
+                <a:satMod val="120000"/>
+              </a:schemeClr>
+            </a:gs>
+          </a:gsLst>
+          <a:lin ang="5400000" scaled="0"/>
+        </a:gradFill>
+      </a:bgFillStyleLst>
+    </a:fmtScheme>
+  </a:themeElements>
+  <a:objectDefaults/>
+  <a:extraClrSchemeLst/>
+  <a:extLst>
+    <a:ext uri="{05A4C25C-085E-4340-85A3-A5531E510DB2}">
+      <thm15:themeFamily xmlns:thm15="http://schemas.microsoft.com/office/thememl/2012/main" name="Office Theme" id="{62F939B6-93AF-4DB8-9C6B-D6C7DFDC589F}" vid="{4A3C46E8-61CC-4603-A589-7422A47A8E4A}"/>
+    </a:ext>
+  </a:extLst>
+</a:theme>
+</file>
+
+<file path=ppt/theme/theme2.xml><?xml version="1.0" encoding="utf-8"?>
+<a:theme xmlns:a="http://schemas.openxmlformats.org/drawingml/2006/main" name="Office 佈景主題">
+  <a:themeElements>
+    <a:clrScheme name="Office">
+      <a:dk1>
+        <a:sysClr val="windowText" lastClr="000000"/>
+      </a:dk1>
+      <a:lt1>
+        <a:sysClr val="window" lastClr="FFFFFF"/>
+      </a:lt1>
+      <a:dk2>
+        <a:srgbClr val="44546A"/>
+      </a:dk2>
+      <a:lt2>
+        <a:srgbClr val="E7E6E6"/>
+      </a:lt2>
+      <a:accent1>
+        <a:srgbClr val="4472C4"/>
+      </a:accent1>
+      <a:accent2>
+        <a:srgbClr val="ED7D31"/>
+      </a:accent2>
+      <a:accent3>
+        <a:srgbClr val="A5A5A5"/>
+      </a:accent3>
+      <a:accent4>
+        <a:srgbClr val="FFC000"/>
+      </a:accent4>
+      <a:accent5>
+        <a:srgbClr val="5B9BD5"/>
+      </a:accent5>
+      <a:accent6>
+        <a:srgbClr val="70AD47"/>
+      </a:accent6>
+      <a:hlink>
+        <a:srgbClr val="0563C1"/>
+      </a:hlink>
+      <a:folHlink>
+        <a:srgbClr val="954F72"/>
+      </a:folHlink>
+    </a:clrScheme>
+    <a:fontScheme name="Office">
+      <a:majorFont>
+        <a:latin typeface="Calibri Light" panose="020F0302020204030204"/>
+        <a:ea typeface=""/>
+        <a:cs typeface=""/>
+        <a:font script="Jpan" typeface="游ゴシック Light"/>
+        <a:font script="Hang" typeface="맑은 고딕"/>
+        <a:font script="Hans" typeface="等线 Light"/>
+        <a:font script="Hant" typeface="新細明體"/>
+        <a:font script="Arab" typeface="Times New Roman"/>
+        <a:font script="Hebr" typeface="Times New Roman"/>
+        <a:font script="Thai" typeface="Angsana New"/>
+        <a:font script="Ethi" typeface="Nyala"/>
+        <a:font script="Beng" typeface="Vrinda"/>
+        <a:font script="Gujr" typeface="Shruti"/>
+        <a:font script="Khmr" typeface="MoolBoran"/>
+        <a:font script="Knda" typeface="Tunga"/>
+        <a:font script="Guru" typeface="Raavi"/>
+        <a:font script="Cans" typeface="Euphemia"/>
+        <a:font script="Cher" typeface="Plantagenet Cherokee"/>
+        <a:font script="Yiii" typeface="Microsoft Yi Baiti"/>
+        <a:font script="Tibt" typeface="Microsoft Himalaya"/>
+        <a:font script="Thaa" typeface="MV Boli"/>
+        <a:font script="Deva" typeface="Mangal"/>
+        <a:font script="Telu" typeface="Gautami"/>
+        <a:font script="Taml" typeface="Latha"/>
+        <a:font script="Syrc" typeface="Estrangelo Edessa"/>
+        <a:font script="Orya" typeface="Kalinga"/>
+        <a:font script="Mlym" typeface="Kartika"/>
+        <a:font script="Laoo" typeface="DokChampa"/>
+        <a:font script="Sinh" typeface="Iskoola Pota"/>
+        <a:font script="Mong" typeface="Mongolian Baiti"/>
+        <a:font script="Viet" typeface="Times New Roman"/>
+        <a:font script="Uigh" typeface="Microsoft Uighur"/>
+        <a:font script="Geor" typeface="Sylfaen"/>
+        <a:font script="Armn" typeface="Arial"/>
+        <a:font script="Bugi" typeface="Leelawadee UI"/>
+        <a:font script="Bopo" typeface="Microsoft JhengHei"/>
+        <a:font script="Java" typeface="Javanese Text"/>
+        <a:font script="Lisu" typeface="Segoe UI"/>
+        <a:font script="Mymr" typeface="Myanmar Text"/>
+        <a:font script="Nkoo" typeface="Ebrima"/>
+        <a:font script="Olck" typeface="Nirmala UI"/>
+        <a:font script="Osma" typeface="Ebrima"/>
+        <a:font script="Phag" typeface="Phagspa"/>
+        <a:font script="Syrn" typeface="Estrangelo Edessa"/>
+        <a:font script="Syrj" typeface="Estrangelo Edessa"/>
+        <a:font script="Syre" typeface="Estrangelo Edessa"/>
+        <a:font script="Sora" typeface="Nirmala UI"/>
+        <a:font script="Tale" typeface="Microsoft Tai Le"/>
+        <a:font script="Talu" typeface="Microsoft New Tai Lue"/>
+        <a:font script="Tfng" typeface="Ebrima"/>
+      </a:majorFont>
+      <a:minorFont>
+        <a:latin typeface="Calibri" panose="020F0502020204030204"/>
+        <a:ea typeface=""/>
+        <a:cs typeface=""/>
+        <a:font script="Jpan" typeface="游ゴシック"/>
+        <a:font script="Hang" typeface="맑은 고딕"/>
+        <a:font script="Hans" typeface="等线"/>
+        <a:font script="Hant" typeface="新細明體"/>
+        <a:font script="Arab" typeface="Arial"/>
+        <a:font script="Hebr" typeface="Arial"/>
+        <a:font script="Thai" typeface="Cordia New"/>
+        <a:font script="Ethi" typeface="Nyala"/>
+        <a:font script="Beng" typeface="Vrinda"/>
+        <a:font script="Gujr" typeface="Shruti"/>
+        <a:font script="Khmr" typeface="DaunPenh"/>
+        <a:font script="Knda" typeface="Tunga"/>
+        <a:font script="Guru" typeface="Raavi"/>
+        <a:font script="Cans" typeface="Euphemia"/>
+        <a:font script="Cher" typeface="Plantagenet Cherokee"/>
+        <a:font script="Yiii" typeface="Microsoft Yi Baiti"/>
+        <a:font script="Tibt" typeface="Microsoft Himalaya"/>
+        <a:font script="Thaa" typeface="MV Boli"/>
+        <a:font script="Deva" typeface="Mangal"/>
+        <a:font script="Telu" typeface="Gautami"/>
+        <a:font script="Taml" typeface="Latha"/>
+        <a:font script="Syrc" typeface="Estrangelo Edessa"/>
+        <a:font script="Orya" typeface="Kalinga"/>
+        <a:font script="Mlym" typeface="Kartika"/>
+        <a:font script="Laoo" typeface="DokChampa"/>
+        <a:font script="Sinh" typeface="Iskoola Pota"/>
+        <a:font script="Mong" typeface="Mongolian Baiti"/>
+        <a:font script="Viet" typeface="Arial"/>
+        <a:font script="Uigh" typeface="Microsoft Uighur"/>
+        <a:font script="Geor" typeface="Sylfaen"/>
+        <a:font script="Armn" typeface="Arial"/>
+        <a:font script="Bugi" typeface="Leelawadee UI"/>
+        <a:font script="Bopo" typeface="Microsoft JhengHei"/>
+        <a:font script="Java" typeface="Javanese Text"/>
+        <a:font script="Lisu" typeface="Segoe UI"/>
+        <a:font script="Mymr" typeface="Myanmar Text"/>
+        <a:font script="Nkoo" typeface="Ebrima"/>
+        <a:font script="Olck" typeface="Nirmala UI"/>
+        <a:font script="Osma" typeface="Ebrima"/>
+        <a:font script="Phag" typeface="Phagspa"/>
+        <a:font script="Syrn" typeface="Estrangelo Edessa"/>
+        <a:font script="Syrj" typeface="Estrangelo Edessa"/>
+        <a:font script="Syre" typeface="Estrangelo Edessa"/>
+        <a:font script="Sora" typeface="Nirmala UI"/>
+        <a:font script="Tale" typeface="Microsoft Tai Le"/>
+        <a:font script="Talu" typeface="Microsoft New Tai Lue"/>
+        <a:font script="Tfng" typeface="Ebrima"/>
+      </a:minorFont>
+    </a:fontScheme>
+    <a:fmtScheme name="Office">
+      <a:fillStyleLst>
+        <a:solidFill>
+          <a:schemeClr val="phClr"/>
+        </a:solidFill>
+        <a:gradFill rotWithShape="1">
+          <a:gsLst>
+            <a:gs pos="0">
+              <a:schemeClr val="phClr">
+                <a:lumMod val="110000"/>
+                <a:satMod val="105000"/>
+                <a:tint val="67000"/>
+              </a:schemeClr>
+            </a:gs>
+            <a:gs pos="50000">
+              <a:schemeClr val="phClr">
+                <a:lumMod val="105000"/>
+                <a:satMod val="103000"/>
+                <a:tint val="73000"/>
+              </a:schemeClr>
+            </a:gs>
+            <a:gs pos="100000">
+              <a:schemeClr val="phClr">
+                <a:lumMod val="105000"/>
+                <a:satMod val="109000"/>
+                <a:tint val="81000"/>
+              </a:schemeClr>
+            </a:gs>
+          </a:gsLst>
+          <a:lin ang="5400000" scaled="0"/>
+        </a:gradFill>
+        <a:gradFill rotWithShape="1">
+          <a:gsLst>
+            <a:gs pos="0">
+              <a:schemeClr val="phClr">
+                <a:satMod val="103000"/>
+                <a:lumMod val="102000"/>
+                <a:tint val="94000"/>
+              </a:schemeClr>
+            </a:gs>
+            <a:gs pos="50000">
+              <a:schemeClr val="phClr">
+                <a:satMod val="110000"/>
+                <a:lumMod val="100000"/>
+                <a:shade val="100000"/>
+              </a:schemeClr>
+            </a:gs>
+            <a:gs pos="100000">
+              <a:schemeClr val="phClr">
+                <a:lumMod val="99000"/>
+                <a:satMod val="120000"/>
+                <a:shade val="78000"/>
+              </a:schemeClr>
+            </a:gs>
+          </a:gsLst>
+          <a:lin ang="5400000" scaled="0"/>
+        </a:gradFill>
+      </a:fillStyleLst>
+      <a:lnStyleLst>
+        <a:ln w="6350" cap="flat" cmpd="sng" algn="ctr">
+          <a:solidFill>
+            <a:schemeClr val="phClr"/>
+          </a:solidFill>
+          <a:prstDash val="solid"/>
+          <a:miter lim="800000"/>
+        </a:ln>
+        <a:ln w="12700" cap="flat" cmpd="sng" algn="ctr">
+          <a:solidFill>
+            <a:schemeClr val="phClr"/>
+          </a:solidFill>
+          <a:prstDash val="solid"/>
+          <a:miter lim="800000"/>
+        </a:ln>
+        <a:ln w="19050" cap="flat" cmpd="sng" algn="ctr">
+          <a:solidFill>
+            <a:schemeClr val="phClr"/>
+          </a:solidFill>
+          <a:prstDash val="solid"/>
+          <a:miter lim="800000"/>
+        </a:ln>
+      </a:lnStyleLst>
+      <a:effectStyleLst>
+        <a:effectStyle>
+          <a:effectLst/>
+        </a:effectStyle>
+        <a:effectStyle>
+          <a:effectLst/>
+        </a:effectStyle>
+        <a:effectStyle>
+          <a:effectLst>
+            <a:outerShdw blurRad="57150" dist="19050" dir="5400000" algn="ctr" rotWithShape="0">
+              <a:srgbClr val="000000">
+                <a:alpha val="63000"/>
+              </a:srgbClr>
+            </a:outerShdw>
+          </a:effectLst>
+        </a:effectStyle>
+      </a:effectStyleLst>
+      <a:bgFillStyleLst>
+        <a:solidFill>
+          <a:schemeClr val="phClr"/>
+        </a:solidFill>
+        <a:solidFill>
+          <a:schemeClr val="phClr">
+            <a:tint val="95000"/>
+            <a:satMod val="170000"/>
+          </a:schemeClr>
+        </a:solidFill>
+        <a:gradFill rotWithShape="1">
+          <a:gsLst>
+            <a:gs pos="0">
+              <a:schemeClr val="phClr">
+                <a:tint val="93000"/>
+                <a:satMod val="150000"/>
+                <a:shade val="98000"/>
+                <a:lumMod val="102000"/>
+              </a:schemeClr>
+            </a:gs>
+            <a:gs pos="50000">
+              <a:schemeClr val="phClr">
+                <a:tint val="98000"/>
+                <a:satMod val="130000"/>
+                <a:shade val="90000"/>
+                <a:lumMod val="103000"/>
+              </a:schemeClr>
+            </a:gs>
+            <a:gs pos="100000">
+              <a:schemeClr val="phClr">
+                <a:shade val="63000"/>
+                <a:satMod val="120000"/>
+              </a:schemeClr>
+            </a:gs>
+          </a:gsLst>
+          <a:lin ang="5400000" scaled="0"/>
+        </a:gradFill>
+      </a:bgFillStyleLst>
+    </a:fmtScheme>
+  </a:themeElements>
+  <a:objectDefaults/>
+  <a:extraClrSchemeLst/>
+  <a:extLst>
+    <a:ext uri="{05A4C25C-085E-4340-85A3-A5531E510DB2}">
+      <thm15:themeFamily xmlns:thm15="http://schemas.microsoft.com/office/thememl/2012/main" name="Office Theme" id="{62F939B6-93AF-4DB8-9C6B-D6C7DFDC589F}" vid="{4A3C46E8-61CC-4603-A589-7422A47A8E4A}"/>
+    </a:ext>
+  </a:extLst>
+</a:theme>
+</file>
+
+<file path=ppt/theme/theme3.xml><?xml version="1.0" encoding="utf-8"?>
+<a:theme xmlns:a="http://schemas.openxmlformats.org/drawingml/2006/main" name="Office 佈景主題">
+  <a:themeElements>
+    <a:clrScheme name="Office">
+      <a:dk1>
+        <a:sysClr val="windowText" lastClr="000000"/>
+      </a:dk1>
+      <a:lt1>
+        <a:sysClr val="window" lastClr="FFFFFF"/>
+      </a:lt1>
+      <a:dk2>
+        <a:srgbClr val="44546A"/>
+      </a:dk2>
+      <a:lt2>
+        <a:srgbClr val="E7E6E6"/>
+      </a:lt2>
+      <a:accent1>
+        <a:srgbClr val="4472C4"/>
+      </a:accent1>
+      <a:accent2>
+        <a:srgbClr val="ED7D31"/>
+      </a:accent2>
+      <a:accent3>
+        <a:srgbClr val="A5A5A5"/>
+      </a:accent3>
+      <a:accent4>
+        <a:srgbClr val="FFC000"/>
+      </a:accent4>
+      <a:accent5>
+        <a:srgbClr val="5B9BD5"/>
+      </a:accent5>
+      <a:accent6>
+        <a:srgbClr val="70AD47"/>
+      </a:accent6>
+      <a:hlink>
+        <a:srgbClr val="0563C1"/>
+      </a:hlink>
+      <a:folHlink>
+        <a:srgbClr val="954F72"/>
+      </a:folHlink>
+    </a:clrScheme>
+    <a:fontScheme name="Office">
+      <a:majorFont>
+        <a:latin typeface="Calibri Light" panose="020F0302020204030204"/>
+        <a:ea typeface=""/>
+        <a:cs typeface=""/>
+        <a:font script="Jpan" typeface="游ゴシック Light"/>
+        <a:font script="Hang" typeface="맑은 고딕"/>
+        <a:font script="Hans" typeface="等线 Light"/>
+        <a:font script="Hant" typeface="新細明體"/>
+        <a:font script="Arab" typeface="Times New Roman"/>
+        <a:font script="Hebr" typeface="Times New Roman"/>
+        <a:font script="Thai" typeface="Angsana New"/>
+        <a:font script="Ethi" typeface="Nyala"/>
+        <a:font script="Beng" typeface="Vrinda"/>
+        <a:font script="Gujr" typeface="Shruti"/>
+        <a:font script="Khmr" typeface="MoolBoran"/>
+        <a:font script="Knda" typeface="Tunga"/>
+        <a:font script="Guru" typeface="Raavi"/>
+        <a:font script="Cans" typeface="Euphemia"/>
+        <a:font script="Cher" typeface="Plantagenet Cherokee"/>
+        <a:font script="Yiii" typeface="Microsoft Yi Baiti"/>
+        <a:font script="Tibt" typeface="Microsoft Himalaya"/>
+        <a:font script="Thaa" typeface="MV Boli"/>
+        <a:font script="Deva" typeface="Mangal"/>
+        <a:font script="Telu" typeface="Gautami"/>
+        <a:font script="Taml" typeface="Latha"/>
+        <a:font script="Syrc" typeface="Estrangelo Edessa"/>
+        <a:font script="Orya" typeface="Kalinga"/>
+        <a:font script="Mlym" typeface="Kartika"/>
+        <a:font script="Laoo" typeface="DokChampa"/>
+        <a:font script="Sinh" typeface="Iskoola Pota"/>
+        <a:font script="Mong" typeface="Mongolian Baiti"/>
+        <a:font script="Viet" typeface="Times New Roman"/>
+        <a:font script="Uigh" typeface="Microsoft Uighur"/>
+        <a:font script="Geor" typeface="Sylfaen"/>
+        <a:font script="Armn" typeface="Arial"/>
+        <a:font script="Bugi" typeface="Leelawadee UI"/>
+        <a:font script="Bopo" typeface="Microsoft JhengHei"/>
+        <a:font script="Java" typeface="Javanese Text"/>
+        <a:font script="Lisu" typeface="Segoe UI"/>
+        <a:font script="Mymr" typeface="Myanmar Text"/>
+        <a:font script="Nkoo" typeface="Ebrima"/>
+        <a:font script="Olck" typeface="Nirmala UI"/>
+        <a:font script="Osma" typeface="Ebrima"/>
+        <a:font script="Phag" typeface="Phagspa"/>
+        <a:font script="Syrn" typeface="Estrangelo Edessa"/>
+        <a:font script="Syrj" typeface="Estrangelo Edessa"/>
+        <a:font script="Syre" typeface="Estrangelo Edessa"/>
+        <a:font script="Sora" typeface="Nirmala UI"/>
+        <a:font script="Tale" typeface="Microsoft Tai Le"/>
+        <a:font script="Talu" typeface="Microsoft New Tai Lue"/>
+        <a:font script="Tfng" typeface="Ebrima"/>
+      </a:majorFont>
+      <a:minorFont>
+        <a:latin typeface="Calibri" panose="020F0502020204030204"/>
+        <a:ea typeface=""/>
+        <a:cs typeface=""/>
+        <a:font script="Jpan" typeface="游ゴシック"/>
+        <a:font script="Hang" typeface="맑은 고딕"/>
+        <a:font script="Hans" typeface="等线"/>
+        <a:font script="Hant" typeface="新細明體"/>
+        <a:font script="Arab" typeface="Arial"/>
+        <a:font script="Hebr" typeface="Arial"/>
+        <a:font script="Thai" typeface="Cordia New"/>
+        <a:font script="Ethi" typeface="Nyala"/>
+        <a:font script="Beng" typeface="Vrinda"/>
+        <a:font script="Gujr" typeface="Shruti"/>
+        <a:font script="Khmr" typeface="DaunPenh"/>
+        <a:font script="Knda" typeface="Tunga"/>
+        <a:font script="Guru" typeface="Raavi"/>
+        <a:font script="Cans" typeface="Euphemia"/>
+        <a:font script="Cher" typeface="Plantagenet Cherokee"/>
+        <a:font script="Yiii" typeface="Microsoft Yi Baiti"/>
+        <a:font script="Tibt" typeface="Microsoft Himalaya"/>
+        <a:font script="Thaa" typeface="MV Boli"/>
+        <a:font script="Deva" typeface="Mangal"/>
+        <a:font script="Telu" typeface="Gautami"/>
+        <a:font script="Taml" typeface="Latha"/>
+        <a:font script="Syrc" typeface="Estrangelo Edessa"/>
+        <a:font script="Orya" typeface="Kalinga"/>
+        <a:font script="Mlym" typeface="Kartika"/>
+        <a:font script="Laoo" typeface="DokChampa"/>
+        <a:font script="Sinh" typeface="Iskoola Pota"/>
+        <a:font script="Mong" typeface="Mongolian Baiti"/>
+        <a:font script="Viet" typeface="Arial"/>
+        <a:font script="Uigh" typeface="Microsoft Uighur"/>
+        <a:font script="Geor" typeface="Sylfaen"/>
+        <a:font script="Armn" typeface="Arial"/>
+        <a:font script="Bugi" typeface="Leelawadee UI"/>
+        <a:font script="Bopo" typeface="Microsoft JhengHei"/>
+        <a:font script="Java" typeface="Javanese Text"/>
+        <a:font script="Lisu" typeface="Segoe UI"/>
+        <a:font script="Mymr" typeface="Myanmar Text"/>
+        <a:font script="Nkoo" typeface="Ebrima"/>
+        <a:font script="Olck" typeface="Nirmala UI"/>
+        <a:font script="Osma" typeface="Ebrima"/>
+        <a:font script="Phag" typeface="Phagspa"/>
+        <a:font script="Syrn" typeface="Estrangelo Edessa"/>
+        <a:font script="Syrj" typeface="Estrangelo Edessa"/>
+        <a:font script="Syre" typeface="Estrangelo Edessa"/>
+        <a:font script="Sora" typeface="Nirmala UI"/>
+        <a:font script="Tale" typeface="Microsoft Tai Le"/>
+        <a:font script="Talu" typeface="Microsoft New Tai Lue"/>
+        <a:font script="Tfng" typeface="Ebrima"/>
+      </a:minorFont>
+    </a:fontScheme>
+    <a:fmtScheme name="Office">
+      <a:fillStyleLst>
+        <a:solidFill>
+          <a:schemeClr val="phClr"/>
+        </a:solidFill>
+        <a:gradFill rotWithShape="1">
+          <a:gsLst>
+            <a:gs pos="0">
+              <a:schemeClr val="phClr">
+                <a:lumMod val="110000"/>
+                <a:satMod val="105000"/>
+                <a:tint val="67000"/>
+              </a:schemeClr>
+            </a:gs>
+            <a:gs pos="50000">
+              <a:schemeClr val="phClr">
+                <a:lumMod val="105000"/>
+                <a:satMod val="103000"/>
+                <a:tint val="73000"/>
+              </a:schemeClr>
+            </a:gs>
+            <a:gs pos="100000">
+              <a:schemeClr val="phClr">
+                <a:lumMod val="105000"/>
+                <a:satMod val="109000"/>
+                <a:tint val="81000"/>
+              </a:schemeClr>
+            </a:gs>
+          </a:gsLst>
+          <a:lin ang="5400000" scaled="0"/>
+        </a:gradFill>
+        <a:gradFill rotWithShape="1">
+          <a:gsLst>
+            <a:gs pos="0">
+              <a:schemeClr val="phClr">
+                <a:satMod val="103000"/>
+                <a:lumMod val="102000"/>
+                <a:tint val="94000"/>
+              </a:schemeClr>
+            </a:gs>
+            <a:gs pos="50000">
+              <a:schemeClr val="phClr">
+                <a:satMod val="110000"/>
+                <a:lumMod val="100000"/>
+                <a:shade val="100000"/>
+              </a:schemeClr>
+            </a:gs>
+            <a:gs pos="100000">
+              <a:schemeClr val="phClr">
+                <a:lumMod val="99000"/>
+                <a:satMod val="120000"/>
+                <a:shade val="78000"/>
+              </a:schemeClr>
+            </a:gs>
+          </a:gsLst>
+          <a:lin ang="5400000" scaled="0"/>
+        </a:gradFill>
+      </a:fillStyleLst>
+      <a:lnStyleLst>
+        <a:ln w="6350" cap="flat" cmpd="sng" algn="ctr">
+          <a:solidFill>
+            <a:schemeClr val="phClr"/>
+          </a:solidFill>
+          <a:prstDash val="solid"/>
+          <a:miter lim="800000"/>
+        </a:ln>
+        <a:ln w="12700" cap="flat" cmpd="sng" algn="ctr">
+          <a:solidFill>
+            <a:schemeClr val="phClr"/>
+          </a:solidFill>
+          <a:prstDash val="solid"/>
+          <a:miter lim="800000"/>
+        </a:ln>
+        <a:ln w="19050" cap="flat" cmpd="sng" algn="ctr">
+          <a:solidFill>
+            <a:schemeClr val="phClr"/>
+          </a:solidFill>
+          <a:prstDash val="solid"/>
+          <a:miter lim="800000"/>
+        </a:ln>
+      </a:lnStyleLst>
+      <a:effectStyleLst>
+        <a:effectStyle>
+          <a:effectLst/>
+        </a:effectStyle>
+        <a:effectStyle>
+          <a:effectLst/>
+        </a:effectStyle>
+        <a:effectStyle>
+          <a:effectLst>
+            <a:outerShdw blurRad="57150" dist="19050" dir="5400000" algn="ctr" rotWithShape="0">
+              <a:srgbClr val="000000">
+                <a:alpha val="63000"/>
+              </a:srgbClr>
+            </a:outerShdw>
+          </a:effectLst>
+        </a:effectStyle>
+      </a:effectStyleLst>
+      <a:bgFillStyleLst>
+        <a:solidFill>
+          <a:schemeClr val="phClr"/>
+        </a:solidFill>
+        <a:solidFill>
+          <a:schemeClr val="phClr">
+            <a:tint val="95000"/>
+            <a:satMod val="170000"/>
+          </a:schemeClr>
+        </a:solidFill>
+        <a:gradFill rotWithShape="1">
+          <a:gsLst>
+            <a:gs pos="0">
+              <a:schemeClr val="phClr">
+                <a:tint val="93000"/>
+                <a:satMod val="150000"/>
+                <a:shade val="98000"/>
+                <a:lumMod val="102000"/>
+              </a:schemeClr>
+            </a:gs>
+            <a:gs pos="50000">
+              <a:schemeClr val="phClr">
+                <a:tint val="98000"/>
+                <a:satMod val="130000"/>
+                <a:shade val="90000"/>
+                <a:lumMod val="103000"/>
+              </a:schemeClr>
+            </a:gs>
+            <a:gs pos="100000">
+              <a:schemeClr val="phClr">
+                <a:shade val="63000"/>
+                <a:satMod val="120000"/>
+              </a:schemeClr>
+            </a:gs>
+          </a:gsLst>
+          <a:lin ang="5400000" scaled="0"/>
+        </a:gradFill>
+      </a:bgFillStyleLst>
+    </a:fmtScheme>
+  </a:themeElements>
+  <a:objectDefaults/>
+  <a:extraClrSchemeLst/>
+  <a:extLst>
+    <a:ext uri="{05A4C25C-085E-4340-85A3-A5531E510DB2}">
+      <thm15:themeFamily xmlns:thm15="http://schemas.microsoft.com/office/thememl/2012/main" name="Office Theme" id="{62F939B6-93AF-4DB8-9C6B-D6C7DFDC589F}" vid="{4A3C46E8-61CC-4603-A589-7422A47A8E4A}"/>
+    </a:ext>
+  </a:extLst>
+</a:theme>
 </file>